--- a/figure/cp3/fig3-5_improved_model_structure.pptx
+++ b/figure/cp3/fig3-5_improved_model_structure.pptx
@@ -5707,10 +5707,10 @@
         </p:nvGrpSpPr>
         <p:grpSpPr>
           <a:xfrm rot="0" flipH="false" flipV="false">
-            <a:off x="506818" y="689115"/>
-            <a:ext cx="10072071" cy="5101770"/>
-            <a:chOff x="76972" y="312983"/>
-            <a:chExt cx="10072071" cy="5101770"/>
+            <a:off x="1620172" y="689115"/>
+            <a:ext cx="8009604" cy="5101770"/>
+            <a:chOff x="1153730" y="254368"/>
+            <a:chExt cx="8036434" cy="4974771"/>
           </a:xfrm>
         </p:grpSpPr>
         <p:grpSp>
@@ -5721,10 +5721,10 @@
           </p:nvGrpSpPr>
           <p:grpSpPr>
             <a:xfrm rot="0" flipH="false" flipV="false">
-              <a:off x="1190326" y="312983"/>
-              <a:ext cx="8009604" cy="5101770"/>
-              <a:chOff x="1153730" y="254368"/>
-              <a:chExt cx="8036434" cy="4974771"/>
+              <a:off x="1153730" y="254368"/>
+              <a:ext cx="7850771" cy="3227587"/>
+              <a:chOff x="696530" y="279768"/>
+              <a:chExt cx="7850771" cy="3227587"/>
             </a:xfrm>
           </p:grpSpPr>
           <p:grpSp>
@@ -5735,978 +5735,22 @@
             </p:nvGrpSpPr>
             <p:grpSpPr>
               <a:xfrm rot="0" flipH="false" flipV="false">
-                <a:off x="1153730" y="254368"/>
-                <a:ext cx="7850771" cy="3227587"/>
-                <a:chOff x="696530" y="279768"/>
-                <a:chExt cx="7850771" cy="3227587"/>
+                <a:off x="1052001" y="404601"/>
+                <a:ext cx="2601265" cy="2112533"/>
+                <a:chOff x="730268" y="836400"/>
+                <a:chExt cx="2914532" cy="3060800"/>
               </a:xfrm>
             </p:grpSpPr>
-            <p:grpSp>
-              <p:nvGrpSpPr>
-                <p:cNvPr id="62" name=""/>
-                <p:cNvGrpSpPr/>
-                <p:nvPr/>
-              </p:nvGrpSpPr>
-              <p:grpSpPr>
-                <a:xfrm rot="0" flipH="false" flipV="false">
-                  <a:off x="1052001" y="404601"/>
-                  <a:ext cx="2601265" cy="2112533"/>
-                  <a:chOff x="730268" y="836400"/>
-                  <a:chExt cx="2914532" cy="3060800"/>
-                </a:xfrm>
-              </p:grpSpPr>
-              <p:sp>
-                <p:nvSpPr>
-                  <p:cNvPr id="63" name="Rounded Rectangle 37"/>
-                  <p:cNvSpPr/>
-                  <p:nvPr/>
-                </p:nvSpPr>
-                <p:spPr>
-                  <a:xfrm rot="0" flipH="false" flipV="false">
-                    <a:off x="2924800" y="836400"/>
-                    <a:ext cx="720000" cy="432000"/>
-                  </a:xfrm>
-                  <a:prstGeom prst="roundRect">
-                    <a:avLst/>
-                  </a:prstGeom>
-                  <a:solidFill>
-                    <a:srgbClr val="E8E0F0"/>
-                  </a:solidFill>
-                  <a:ln w="19050">
-                    <a:solidFill>
-                      <a:srgbClr val="7B68EE"/>
-                    </a:solidFill>
-                  </a:ln>
-                </p:spPr>
-                <p:style>
-                  <a:lnRef idx="1">
-                    <a:schemeClr val="accent1"/>
-                  </a:lnRef>
-                  <a:fillRef idx="3">
-                    <a:schemeClr val="accent1"/>
-                  </a:fillRef>
-                  <a:effectRef idx="2">
-                    <a:schemeClr val="accent1"/>
-                  </a:effectRef>
-                  <a:fontRef idx="minor">
-                    <a:schemeClr val="lt1"/>
-                  </a:fontRef>
-                </p:style>
-                <p:txBody>
-                  <a:bodyPr wrap="square" rtlCol="false" anchor="ctr"/>
-                  <a:lstStyle/>
-                  <a:p>
-                    <a:pPr algn="ctr">
-                      <a:spcBef>
-                        <a:spcPts val="0"/>
-                      </a:spcBef>
-                      <a:spcAft>
-                        <a:spcPts val="0"/>
-                      </a:spcAft>
-                    </a:pPr>
-                    <a:r>
-                      <a:rPr sz="900" b="true">
-                        <a:solidFill>
-                          <a:srgbClr val="000000"/>
-                        </a:solidFill>
-                        <a:latin typeface="Arial"/>
-                      </a:rPr>
-                      <a:t>1×1 Conv</a:t>
-                    </a:r>
-                    <a:endParaRPr/>
-                  </a:p>
-                </p:txBody>
-              </p:sp>
-              <p:sp>
-                <p:nvSpPr>
-                  <p:cNvPr id="64" name="Rounded Rectangle 37"/>
-                  <p:cNvSpPr/>
-                  <p:nvPr/>
-                </p:nvSpPr>
-                <p:spPr>
-                  <a:xfrm rot="0" flipH="false" flipV="false">
-                    <a:off x="2924800" y="2808000"/>
-                    <a:ext cx="720000" cy="432000"/>
-                  </a:xfrm>
-                  <a:prstGeom prst="roundRect">
-                    <a:avLst/>
-                  </a:prstGeom>
-                  <a:solidFill>
-                    <a:srgbClr val="E8E0F0"/>
-                  </a:solidFill>
-                  <a:ln w="19050">
-                    <a:solidFill>
-                      <a:srgbClr val="7B68EE"/>
-                    </a:solidFill>
-                  </a:ln>
-                </p:spPr>
-                <p:style>
-                  <a:lnRef idx="1">
-                    <a:schemeClr val="accent1"/>
-                  </a:lnRef>
-                  <a:fillRef idx="3">
-                    <a:schemeClr val="accent1"/>
-                  </a:fillRef>
-                  <a:effectRef idx="2">
-                    <a:schemeClr val="accent1"/>
-                  </a:effectRef>
-                  <a:fontRef idx="minor">
-                    <a:schemeClr val="lt1"/>
-                  </a:fontRef>
-                </p:style>
-                <p:txBody>
-                  <a:bodyPr wrap="square" rtlCol="false" anchor="ctr"/>
-                  <a:lstStyle/>
-                  <a:p>
-                    <a:pPr lvl="0" algn="ctr"/>
-                    <a:r>
-                      <a:rPr lang="en-US" sz="900" b="true">
-                        <a:solidFill>
-                          <a:srgbClr val="000000">
-                            <a:alpha val="100000"/>
-                          </a:srgbClr>
-                        </a:solidFill>
-                        <a:latin typeface="Arial"/>
-                        <a:ea typeface="宋体"/>
-                        <a:cs typeface="+mn-cs"/>
-                      </a:rPr>
-                      <a:t>3</a:t>
-                    </a:r>
-                    <a:r>
-                      <a:rPr sz="900" b="true">
-                        <a:solidFill>
-                          <a:srgbClr val="000000">
-                            <a:alpha val="100000"/>
-                          </a:srgbClr>
-                        </a:solidFill>
-                        <a:latin typeface="Arial"/>
-                        <a:ea typeface="宋体"/>
-                        <a:cs typeface="+mn-cs"/>
-                      </a:rPr>
-                      <a:t>×</a:t>
-                    </a:r>
-                    <a:r>
-                      <a:rPr lang="en-US" sz="900" b="true">
-                        <a:solidFill>
-                          <a:srgbClr val="000000">
-                            <a:alpha val="100000"/>
-                          </a:srgbClr>
-                        </a:solidFill>
-                        <a:latin typeface="Arial"/>
-                        <a:ea typeface="宋体"/>
-                        <a:cs typeface="+mn-cs"/>
-                      </a:rPr>
-                      <a:t>3</a:t>
-                    </a:r>
-                    <a:r>
-                      <a:rPr sz="900" b="true">
-                        <a:solidFill>
-                          <a:srgbClr val="000000">
-                            <a:alpha val="100000"/>
-                          </a:srgbClr>
-                        </a:solidFill>
-                        <a:latin typeface="Arial"/>
-                        <a:ea typeface="宋体"/>
-                        <a:cs typeface="+mn-cs"/>
-                      </a:rPr>
-                      <a:t> Conv</a:t>
-                    </a:r>
-                    <a:endParaRPr sz="1800">
-                      <a:solidFill>
-                        <a:schemeClr val="lt1">
-                          <a:alpha val="100000"/>
-                        </a:schemeClr>
-                      </a:solidFill>
-                      <a:latin typeface="Calibri"/>
-                      <a:ea typeface="宋体"/>
-                      <a:cs typeface="+mn-cs"/>
-                    </a:endParaRPr>
-                  </a:p>
-                  <a:p>
-                    <a:pPr lvl="0" algn="ctr"/>
-                    <a:r>
-                      <a:rPr lang="en-US" sz="900" b="true">
-                        <a:solidFill>
-                          <a:srgbClr val="000000">
-                            <a:alpha val="100000"/>
-                          </a:srgbClr>
-                        </a:solidFill>
-                        <a:latin typeface="Arial"/>
-                        <a:ea typeface="宋体"/>
-                        <a:cs typeface="+mn-cs"/>
-                      </a:rPr>
-                      <a:t>rate 36</a:t>
-                    </a:r>
-                    <a:endParaRPr/>
-                  </a:p>
-                </p:txBody>
-              </p:sp>
-              <p:sp>
-                <p:nvSpPr>
-                  <p:cNvPr id="65" name="Rounded Rectangle 37"/>
-                  <p:cNvSpPr/>
-                  <p:nvPr/>
-                </p:nvSpPr>
-                <p:spPr>
-                  <a:xfrm rot="0" flipH="false" flipV="false">
-                    <a:off x="2924800" y="2150800"/>
-                    <a:ext cx="720000" cy="432000"/>
-                  </a:xfrm>
-                  <a:prstGeom prst="roundRect">
-                    <a:avLst/>
-                  </a:prstGeom>
-                  <a:solidFill>
-                    <a:srgbClr val="E8E0F0"/>
-                  </a:solidFill>
-                  <a:ln w="19050">
-                    <a:solidFill>
-                      <a:srgbClr val="7B68EE"/>
-                    </a:solidFill>
-                  </a:ln>
-                </p:spPr>
-                <p:style>
-                  <a:lnRef idx="1">
-                    <a:schemeClr val="accent1"/>
-                  </a:lnRef>
-                  <a:fillRef idx="3">
-                    <a:schemeClr val="accent1"/>
-                  </a:fillRef>
-                  <a:effectRef idx="2">
-                    <a:schemeClr val="accent1"/>
-                  </a:effectRef>
-                  <a:fontRef idx="minor">
-                    <a:schemeClr val="lt1"/>
-                  </a:fontRef>
-                </p:style>
-                <p:txBody>
-                  <a:bodyPr wrap="square" rtlCol="false" anchor="ctr"/>
-                  <a:lstStyle/>
-                  <a:p>
-                    <a:pPr lvl="0" algn="ctr"/>
-                    <a:r>
-                      <a:rPr lang="en-US" sz="900" b="true">
-                        <a:solidFill>
-                          <a:srgbClr val="000000">
-                            <a:alpha val="100000"/>
-                          </a:srgbClr>
-                        </a:solidFill>
-                        <a:latin typeface="Arial"/>
-                        <a:ea typeface="宋体"/>
-                        <a:cs typeface="+mn-cs"/>
-                      </a:rPr>
-                      <a:t>3</a:t>
-                    </a:r>
-                    <a:r>
-                      <a:rPr sz="900" b="true">
-                        <a:solidFill>
-                          <a:srgbClr val="000000">
-                            <a:alpha val="100000"/>
-                          </a:srgbClr>
-                        </a:solidFill>
-                        <a:latin typeface="Arial"/>
-                        <a:ea typeface="宋体"/>
-                        <a:cs typeface="+mn-cs"/>
-                      </a:rPr>
-                      <a:t>×</a:t>
-                    </a:r>
-                    <a:r>
-                      <a:rPr lang="en-US" sz="900" b="true">
-                        <a:solidFill>
-                          <a:srgbClr val="000000">
-                            <a:alpha val="100000"/>
-                          </a:srgbClr>
-                        </a:solidFill>
-                        <a:latin typeface="Arial"/>
-                        <a:ea typeface="宋体"/>
-                        <a:cs typeface="+mn-cs"/>
-                      </a:rPr>
-                      <a:t>3</a:t>
-                    </a:r>
-                    <a:r>
-                      <a:rPr sz="900" b="true">
-                        <a:solidFill>
-                          <a:srgbClr val="000000">
-                            <a:alpha val="100000"/>
-                          </a:srgbClr>
-                        </a:solidFill>
-                        <a:latin typeface="Arial"/>
-                        <a:ea typeface="宋体"/>
-                        <a:cs typeface="+mn-cs"/>
-                      </a:rPr>
-                      <a:t> Conv</a:t>
-                    </a:r>
-                    <a:endParaRPr sz="1800">
-                      <a:solidFill>
-                        <a:schemeClr val="lt1">
-                          <a:alpha val="100000"/>
-                        </a:schemeClr>
-                      </a:solidFill>
-                      <a:latin typeface="Calibri"/>
-                      <a:ea typeface="宋体"/>
-                      <a:cs typeface="+mn-cs"/>
-                    </a:endParaRPr>
-                  </a:p>
-                  <a:p>
-                    <a:pPr lvl="0" algn="ctr"/>
-                    <a:r>
-                      <a:rPr lang="en-US" sz="900" b="true">
-                        <a:solidFill>
-                          <a:srgbClr val="000000">
-                            <a:alpha val="100000"/>
-                          </a:srgbClr>
-                        </a:solidFill>
-                        <a:latin typeface="Arial"/>
-                        <a:ea typeface="宋体"/>
-                        <a:cs typeface="+mn-cs"/>
-                      </a:rPr>
-                      <a:t>rate 24</a:t>
-                    </a:r>
-                    <a:endParaRPr/>
-                  </a:p>
-                </p:txBody>
-              </p:sp>
-              <p:sp>
-                <p:nvSpPr>
-                  <p:cNvPr id="66" name="Rounded Rectangle 37"/>
-                  <p:cNvSpPr/>
-                  <p:nvPr/>
-                </p:nvSpPr>
-                <p:spPr>
-                  <a:xfrm rot="0" flipH="false" flipV="false">
-                    <a:off x="2924800" y="1493600"/>
-                    <a:ext cx="720000" cy="432000"/>
-                  </a:xfrm>
-                  <a:prstGeom prst="roundRect">
-                    <a:avLst/>
-                  </a:prstGeom>
-                  <a:solidFill>
-                    <a:srgbClr val="E8E0F0"/>
-                  </a:solidFill>
-                  <a:ln w="19050">
-                    <a:solidFill>
-                      <a:srgbClr val="7B68EE"/>
-                    </a:solidFill>
-                  </a:ln>
-                </p:spPr>
-                <p:style>
-                  <a:lnRef idx="1">
-                    <a:schemeClr val="accent1"/>
-                  </a:lnRef>
-                  <a:fillRef idx="3">
-                    <a:schemeClr val="accent1"/>
-                  </a:fillRef>
-                  <a:effectRef idx="2">
-                    <a:schemeClr val="accent1"/>
-                  </a:effectRef>
-                  <a:fontRef idx="minor">
-                    <a:schemeClr val="lt1"/>
-                  </a:fontRef>
-                </p:style>
-                <p:txBody>
-                  <a:bodyPr wrap="square" rtlCol="false" anchor="ctr"/>
-                  <a:lstStyle/>
-                  <a:p>
-                    <a:pPr algn="ctr">
-                      <a:spcBef>
-                        <a:spcPts val="0"/>
-                      </a:spcBef>
-                      <a:spcAft>
-                        <a:spcPts val="0"/>
-                      </a:spcAft>
-                    </a:pPr>
-                    <a:r>
-                      <a:rPr lang="en-US" sz="900" b="true">
-                        <a:solidFill>
-                          <a:srgbClr val="000000">
-                            <a:alpha val="100000"/>
-                          </a:srgbClr>
-                        </a:solidFill>
-                        <a:latin typeface="Arial"/>
-                        <a:ea typeface="宋体"/>
-                        <a:cs typeface="+mn-cs"/>
-                      </a:rPr>
-                      <a:t>3</a:t>
-                    </a:r>
-                    <a:r>
-                      <a:rPr sz="900" b="true">
-                        <a:solidFill>
-                          <a:srgbClr val="000000">
-                            <a:alpha val="100000"/>
-                          </a:srgbClr>
-                        </a:solidFill>
-                        <a:latin typeface="Arial"/>
-                        <a:ea typeface="宋体"/>
-                        <a:cs typeface="+mn-cs"/>
-                      </a:rPr>
-                      <a:t>×</a:t>
-                    </a:r>
-                    <a:r>
-                      <a:rPr lang="en-US" sz="900" b="true">
-                        <a:solidFill>
-                          <a:srgbClr val="000000">
-                            <a:alpha val="100000"/>
-                          </a:srgbClr>
-                        </a:solidFill>
-                        <a:latin typeface="Arial"/>
-                        <a:ea typeface="宋体"/>
-                        <a:cs typeface="+mn-cs"/>
-                      </a:rPr>
-                      <a:t>3</a:t>
-                    </a:r>
-                    <a:r>
-                      <a:rPr sz="900" b="true">
-                        <a:solidFill>
-                          <a:srgbClr val="000000">
-                            <a:alpha val="100000"/>
-                          </a:srgbClr>
-                        </a:solidFill>
-                        <a:latin typeface="Arial"/>
-                        <a:ea typeface="宋体"/>
-                        <a:cs typeface="+mn-cs"/>
-                      </a:rPr>
-                      <a:t> Conv</a:t>
-                    </a:r>
-                    <a:endParaRPr/>
-                  </a:p>
-                  <a:p>
-                    <a:pPr algn="ctr">
-                      <a:spcBef>
-                        <a:spcPts val="0"/>
-                      </a:spcBef>
-                      <a:spcAft>
-                        <a:spcPts val="0"/>
-                      </a:spcAft>
-                    </a:pPr>
-                    <a:r>
-                      <a:rPr lang="en-US" sz="900" b="true">
-                        <a:solidFill>
-                          <a:srgbClr val="000000">
-                            <a:alpha val="100000"/>
-                          </a:srgbClr>
-                        </a:solidFill>
-                        <a:latin typeface="Arial"/>
-                        <a:ea typeface="宋体"/>
-                        <a:cs typeface="+mn-cs"/>
-                      </a:rPr>
-                      <a:t>rate 12</a:t>
-                    </a:r>
-                    <a:endParaRPr/>
-                  </a:p>
-                </p:txBody>
-              </p:sp>
-              <p:sp>
-                <p:nvSpPr>
-                  <p:cNvPr id="67" name="Rounded Rectangle 37"/>
-                  <p:cNvSpPr/>
-                  <p:nvPr/>
-                </p:nvSpPr>
-                <p:spPr>
-                  <a:xfrm rot="0" flipH="false" flipV="false">
-                    <a:off x="2924800" y="3465200"/>
-                    <a:ext cx="720000" cy="432000"/>
-                  </a:xfrm>
-                  <a:prstGeom prst="roundRect">
-                    <a:avLst/>
-                  </a:prstGeom>
-                  <a:solidFill>
-                    <a:srgbClr val="E8E0F0"/>
-                  </a:solidFill>
-                  <a:ln w="19050">
-                    <a:solidFill>
-                      <a:srgbClr val="7B68EE"/>
-                    </a:solidFill>
-                  </a:ln>
-                </p:spPr>
-                <p:style>
-                  <a:lnRef idx="1">
-                    <a:schemeClr val="accent1"/>
-                  </a:lnRef>
-                  <a:fillRef idx="3">
-                    <a:schemeClr val="accent1"/>
-                  </a:fillRef>
-                  <a:effectRef idx="2">
-                    <a:schemeClr val="accent1"/>
-                  </a:effectRef>
-                  <a:fontRef idx="minor">
-                    <a:schemeClr val="lt1"/>
-                  </a:fontRef>
-                </p:style>
-                <p:txBody>
-                  <a:bodyPr wrap="square" rtlCol="false" anchor="ctr"/>
-                  <a:lstStyle/>
-                  <a:p>
-                    <a:pPr algn="ctr">
-                      <a:spcBef>
-                        <a:spcPts val="0"/>
-                      </a:spcBef>
-                      <a:spcAft>
-                        <a:spcPts val="0"/>
-                      </a:spcAft>
-                    </a:pPr>
-                    <a:r>
-                      <a:rPr lang="en-US" sz="900" b="true">
-                        <a:solidFill>
-                          <a:srgbClr val="000000">
-                            <a:alpha val="100000"/>
-                          </a:srgbClr>
-                        </a:solidFill>
-                        <a:latin typeface="Arial"/>
-                        <a:ea typeface="宋体"/>
-                        <a:cs typeface="+mn-cs"/>
-                      </a:rPr>
-                      <a:t>Image</a:t>
-                    </a:r>
-                    <a:endParaRPr/>
-                  </a:p>
-                  <a:p>
-                    <a:pPr algn="ctr">
-                      <a:spcBef>
-                        <a:spcPts val="0"/>
-                      </a:spcBef>
-                      <a:spcAft>
-                        <a:spcPts val="0"/>
-                      </a:spcAft>
-                    </a:pPr>
-                    <a:r>
-                      <a:rPr lang="en-US" sz="900" b="true">
-                        <a:solidFill>
-                          <a:srgbClr val="000000">
-                            <a:alpha val="100000"/>
-                          </a:srgbClr>
-                        </a:solidFill>
-                        <a:latin typeface="Arial"/>
-                        <a:ea typeface="宋体"/>
-                        <a:cs typeface="+mn-cs"/>
-                      </a:rPr>
-                      <a:t>Pooling</a:t>
-                    </a:r>
-                    <a:endParaRPr/>
-                  </a:p>
-                </p:txBody>
-              </p:sp>
-              <p:sp>
-                <p:nvSpPr>
-                  <p:cNvPr id="68" name=""/>
-                  <p:cNvSpPr/>
-                  <p:nvPr/>
-                </p:nvSpPr>
-                <p:spPr>
-                  <a:xfrm rot="0" flipH="false" flipV="false">
-                    <a:off x="2048934" y="1052400"/>
-                    <a:ext cx="685800" cy="2628799"/>
-                  </a:xfrm>
-                  <a:prstGeom prst="leftBrace">
-                    <a:avLst>
-                      <a:gd name="adj1" fmla="val 8333"/>
-                      <a:gd name="adj2" fmla="val 49033"/>
-                    </a:avLst>
-                  </a:prstGeom>
-                  <a:ln w="12700">
-                    <a:solidFill>
-                      <a:srgbClr val="5C5C5C">
-                        <a:alpha val="100000"/>
-                      </a:srgbClr>
-                    </a:solidFill>
-                    <a:prstDash val="solid"/>
-                    <a:miter lim="800000"/>
-                  </a:ln>
-                </p:spPr>
-                <p:txBody>
-                  <a:bodyPr anchor="ctr"/>
-                  <a:p>
-                    <a:pPr algn="ctr"/>
-                    <a:endParaRPr/>
-                  </a:p>
-                </p:txBody>
-              </p:sp>
-              <p:sp>
-                <p:nvSpPr>
-                  <p:cNvPr id="69" name="Rounded Rectangle 5"/>
-                  <p:cNvSpPr/>
-                  <p:nvPr/>
-                </p:nvSpPr>
-                <p:spPr>
-                  <a:xfrm rot="0" flipH="false" flipV="false">
-                    <a:off x="730268" y="2042800"/>
-                    <a:ext cx="1230200" cy="648000"/>
-                  </a:xfrm>
-                  <a:prstGeom prst="roundRect">
-                    <a:avLst/>
-                  </a:prstGeom>
-                  <a:solidFill>
-                    <a:srgbClr val="D6E6F2"/>
-                  </a:solidFill>
-                  <a:ln w="19050">
-                    <a:solidFill>
-                      <a:srgbClr val="4A7BA7"/>
-                    </a:solidFill>
-                  </a:ln>
-                </p:spPr>
-                <p:style>
-                  <a:lnRef idx="1">
-                    <a:schemeClr val="accent1"/>
-                  </a:lnRef>
-                  <a:fillRef idx="3">
-                    <a:schemeClr val="accent1"/>
-                  </a:fillRef>
-                  <a:effectRef idx="2">
-                    <a:schemeClr val="accent1"/>
-                  </a:effectRef>
-                  <a:fontRef idx="minor">
-                    <a:schemeClr val="lt1"/>
-                  </a:fontRef>
-                </p:style>
-                <p:txBody>
-                  <a:bodyPr wrap="square" rtlCol="false" anchor="ctr"/>
-                  <a:lstStyle/>
-                  <a:p>
-                    <a:pPr algn="ctr">
-                      <a:spcBef>
-                        <a:spcPts val="0"/>
-                      </a:spcBef>
-                      <a:spcAft>
-                        <a:spcPts val="0"/>
-                      </a:spcAft>
-                    </a:pPr>
-                    <a:r>
-                      <a:rPr lang="en-US" sz="1100" b="true">
-                        <a:solidFill>
-                          <a:srgbClr val="000000">
-                            <a:alpha val="100000"/>
-                          </a:srgbClr>
-                        </a:solidFill>
-                        <a:latin typeface="Arial"/>
-                        <a:ea typeface="宋体"/>
-                        <a:cs typeface="+mn-cs"/>
-                      </a:rPr>
-                      <a:t>ResNet18-V1c</a:t>
-                    </a:r>
-                    <a:endParaRPr/>
-                  </a:p>
-                  <a:p>
-                    <a:pPr algn="ctr">
-                      <a:spcBef>
-                        <a:spcPts val="0"/>
-                      </a:spcBef>
-                      <a:spcAft>
-                        <a:spcPts val="0"/>
-                      </a:spcAft>
-                    </a:pPr>
-                    <a:r>
-                      <a:rPr lang="en-US" sz="800" b="false">
-                        <a:solidFill>
-                          <a:srgbClr val="646464">
-                            <a:alpha val="100000"/>
-                          </a:srgbClr>
-                        </a:solidFill>
-                        <a:latin typeface="Arial"/>
-                        <a:ea typeface="宋体"/>
-                        <a:cs typeface="+mn-cs"/>
-                      </a:rPr>
-                      <a:t>(Backbone) </a:t>
-                    </a:r>
-                    <a:endParaRPr/>
-                  </a:p>
-                </p:txBody>
-              </p:sp>
-            </p:grpSp>
             <p:sp>
               <p:nvSpPr>
-                <p:cNvPr id="70" name=""/>
+                <p:cNvPr id="62" name="Rounded Rectangle 37"/>
                 <p:cNvSpPr/>
                 <p:nvPr/>
               </p:nvSpPr>
               <p:spPr>
                 <a:xfrm rot="0" flipH="false" flipV="false">
-                  <a:off x="718189" y="279768"/>
-                  <a:ext cx="7829112" cy="2362200"/>
-                </a:xfrm>
-                <a:prstGeom prst="roundRect">
-                  <a:avLst/>
-                </a:prstGeom>
-                <a:noFill/>
-                <a:ln w="12700">
-                  <a:solidFill>
-                    <a:srgbClr val="5C5C5C">
-                      <a:alpha val="100000"/>
-                    </a:srgbClr>
-                  </a:solidFill>
-                  <a:prstDash val="sysDash"/>
-                  <a:miter lim="800000"/>
-                </a:ln>
-              </p:spPr>
-              <p:txBody>
-                <a:bodyPr anchor="ctr"/>
-                <a:p>
-                  <a:pPr algn="ctr"/>
-                  <a:endParaRPr/>
-                </a:p>
-              </p:txBody>
-            </p:sp>
-            <p:sp>
-              <p:nvSpPr>
-                <p:cNvPr id="71" name="TextBox 51"/>
-                <p:cNvSpPr txBox="true"/>
-                <p:nvPr/>
-              </p:nvSpPr>
-              <p:spPr>
-                <a:xfrm rot="0" flipH="false" flipV="false">
-                  <a:off x="696530" y="314601"/>
-                  <a:ext cx="1080000" cy="180000"/>
-                </a:xfrm>
-                <a:prstGeom prst="rect">
-                  <a:avLst/>
-                </a:prstGeom>
-                <a:noFill/>
-              </p:spPr>
-              <p:txBody>
-                <a:bodyPr wrap="square">
-                  <a:spAutoFit/>
-                </a:bodyPr>
-                <a:lstStyle/>
-                <a:p>
-                  <a:pPr algn="ctr">
-                    <a:defRPr sz="1400" b="true">
-                      <a:solidFill>
-                        <a:srgbClr val="2E75B6"/>
-                      </a:solidFill>
-                      <a:latin typeface="Arial"/>
-                    </a:defRPr>
-                  </a:pPr>
-                  <a:r>
-                    <a:rPr/>
-                    <a:t>Encoder</a:t>
-                  </a:r>
-                  <a:endParaRPr/>
-                </a:p>
-              </p:txBody>
-            </p:sp>
-            <p:sp>
-              <p:nvSpPr>
-                <p:cNvPr id="72" name=""/>
-                <p:cNvSpPr/>
-                <p:nvPr/>
-              </p:nvSpPr>
-              <p:spPr>
-                <a:xfrm rot="0" flipH="false" flipV="false">
-                  <a:off x="3822903" y="531251"/>
-                  <a:ext cx="855133" cy="1859232"/>
-                </a:xfrm>
-                <a:prstGeom prst="rightBrace">
-                  <a:avLst>
-                    <a:gd name="adj1" fmla="val 8333"/>
-                    <a:gd name="adj2" fmla="val 49089"/>
-                  </a:avLst>
-                </a:prstGeom>
-                <a:ln w="12700">
-                  <a:solidFill>
-                    <a:srgbClr val="5C5C5C">
-                      <a:alpha val="100000"/>
-                    </a:srgbClr>
-                  </a:solidFill>
-                  <a:prstDash val="solid"/>
-                  <a:miter lim="800000"/>
-                </a:ln>
-              </p:spPr>
-              <p:txBody>
-                <a:bodyPr anchor="ctr"/>
-                <a:p>
-                  <a:pPr algn="ctr"/>
-                  <a:endParaRPr/>
-                </a:p>
-              </p:txBody>
-            </p:sp>
-            <p:sp>
-              <p:nvSpPr>
-                <p:cNvPr id="73" name="Rounded Rectangle 34"/>
-                <p:cNvSpPr/>
-                <p:nvPr/>
-              </p:nvSpPr>
-              <p:spPr>
-                <a:xfrm rot="0" flipH="false" flipV="false">
-                  <a:off x="4737509" y="1194999"/>
+                  <a:off x="2924800" y="836400"/>
                   <a:ext cx="720000" cy="432000"/>
-                </a:xfrm>
-                <a:prstGeom prst="roundRect">
-                  <a:avLst/>
-                </a:prstGeom>
-                <a:solidFill>
-                  <a:srgbClr val="E8E0F0"/>
-                </a:solidFill>
-                <a:ln w="19050">
-                  <a:solidFill>
-                    <a:srgbClr val="7B68EE"/>
-                  </a:solidFill>
-                </a:ln>
-              </p:spPr>
-              <p:style>
-                <a:lnRef idx="1">
-                  <a:schemeClr val="accent1"/>
-                </a:lnRef>
-                <a:fillRef idx="3">
-                  <a:schemeClr val="accent1"/>
-                </a:fillRef>
-                <a:effectRef idx="2">
-                  <a:schemeClr val="accent1"/>
-                </a:effectRef>
-                <a:fontRef idx="minor">
-                  <a:schemeClr val="lt1"/>
-                </a:fontRef>
-              </p:style>
-              <p:txBody>
-                <a:bodyPr wrap="square" rtlCol="false" anchor="ctr"/>
-                <a:lstStyle/>
-                <a:p>
-                  <a:pPr algn="ctr">
-                    <a:spcBef>
-                      <a:spcPts val="0"/>
-                    </a:spcBef>
-                    <a:spcAft>
-                      <a:spcPts val="0"/>
-                    </a:spcAft>
-                  </a:pPr>
-                  <a:r>
-                    <a:rPr sz="1000" b="true">
-                      <a:solidFill>
-                        <a:srgbClr val="000000"/>
-                      </a:solidFill>
-                      <a:latin typeface="Arial"/>
-                    </a:rPr>
-                    <a:t>Concat</a:t>
-                  </a:r>
-                  <a:endParaRPr/>
-                </a:p>
-              </p:txBody>
-            </p:sp>
-            <p:cxnSp>
-              <p:nvCxnSpPr>
-                <p:cNvPr id="74" name="Connector 9"/>
-                <p:cNvCxnSpPr/>
-                <p:nvPr/>
-              </p:nvCxnSpPr>
-              <p:spPr>
-                <a:xfrm rot="0" flipH="false" flipV="false">
-                  <a:off x="5516982" y="1438438"/>
-                  <a:ext cx="288000" cy="0"/>
-                </a:xfrm>
-                <a:prstGeom prst="line">
-                  <a:avLst/>
-                </a:prstGeom>
-                <a:ln w="19050">
-                  <a:solidFill>
-                    <a:srgbClr val="000000"/>
-                  </a:solidFill>
-                  <a:tailEnd type="triangle" w="med" len="med"/>
-                </a:ln>
-              </p:spPr>
-              <p:style>
-                <a:lnRef idx="2">
-                  <a:schemeClr val="accent1"/>
-                </a:lnRef>
-                <a:fillRef idx="0">
-                  <a:schemeClr val="accent1"/>
-                </a:fillRef>
-                <a:effectRef idx="1">
-                  <a:schemeClr val="accent1"/>
-                </a:effectRef>
-                <a:fontRef idx="minor">
-                  <a:schemeClr val="tx1"/>
-                </a:fontRef>
-              </p:style>
-            </p:cxnSp>
-            <p:sp>
-              <p:nvSpPr>
-                <p:cNvPr id="75" name="Rounded Rectangle 20"/>
-                <p:cNvSpPr/>
-                <p:nvPr/>
-              </p:nvSpPr>
-              <p:spPr>
-                <a:xfrm rot="0" flipH="false" flipV="false">
-                  <a:off x="5864455" y="1033602"/>
-                  <a:ext cx="1007999" cy="792000"/>
-                </a:xfrm>
-                <a:prstGeom prst="roundRect">
-                  <a:avLst/>
-                </a:prstGeom>
-                <a:solidFill>
-                  <a:srgbClr val="E8F5E9"/>
-                </a:solidFill>
-                <a:ln w="31750">
-                  <a:solidFill>
-                    <a:srgbClr val="4CAF50"/>
-                  </a:solidFill>
-                </a:ln>
-              </p:spPr>
-              <p:style>
-                <a:lnRef idx="1">
-                  <a:schemeClr val="accent1"/>
-                </a:lnRef>
-                <a:fillRef idx="3">
-                  <a:schemeClr val="accent1"/>
-                </a:fillRef>
-                <a:effectRef idx="2">
-                  <a:schemeClr val="accent1"/>
-                </a:effectRef>
-                <a:fontRef idx="minor">
-                  <a:schemeClr val="lt1"/>
-                </a:fontRef>
-              </p:style>
-              <p:txBody>
-                <a:bodyPr wrap="square" rtlCol="false" anchor="ctr"/>
-                <a:lstStyle/>
-                <a:p>
-                  <a:pPr algn="ctr">
-                    <a:spcBef>
-                      <a:spcPts val="0"/>
-                    </a:spcBef>
-                    <a:spcAft>
-                      <a:spcPts val="0"/>
-                    </a:spcAft>
-                  </a:pPr>
-                  <a:r>
-                    <a:rPr sz="1100" b="true">
-                      <a:solidFill>
-                        <a:srgbClr val="1B5E20"/>
-                      </a:solidFill>
-                      <a:latin typeface="Arial"/>
-                    </a:rPr>
-                    <a:t>TR Module</a:t>
-                  </a:r>
-                  <a:endParaRPr/>
-                </a:p>
-                <a:p>
-                  <a:pPr algn="ctr">
-                    <a:spcBef>
-                      <a:spcPts val="0"/>
-                    </a:spcBef>
-                    <a:spcAft>
-                      <a:spcPts val="0"/>
-                    </a:spcAft>
-                  </a:pPr>
-                  <a:r>
-                    <a:rPr sz="800" b="false">
-                      <a:solidFill>
-                        <a:srgbClr val="646464"/>
-                      </a:solidFill>
-                      <a:latin typeface="Arial"/>
-                    </a:rPr>
-                    <a:t>Bi-Level Routing
-Attention</a:t>
-                  </a:r>
-                  <a:endParaRPr/>
-                </a:p>
-              </p:txBody>
-            </p:sp>
-            <p:sp>
-              <p:nvSpPr>
-                <p:cNvPr id="76" name="Rounded Rectangle 37"/>
-                <p:cNvSpPr/>
-                <p:nvPr/>
-              </p:nvSpPr>
-              <p:spPr>
-                <a:xfrm rot="0" flipH="false" flipV="false">
-                  <a:off x="7405149" y="1280522"/>
-                  <a:ext cx="642611" cy="298162"/>
                 </a:xfrm>
                 <a:prstGeom prst="roundRect">
                   <a:avLst/>
@@ -6759,57 +5803,267 @@
                 </a:p>
               </p:txBody>
             </p:sp>
-            <p:cxnSp>
-              <p:nvCxnSpPr>
-                <p:cNvPr id="77" name="Connector 9"/>
-                <p:cNvCxnSpPr/>
-                <p:nvPr/>
-              </p:nvCxnSpPr>
-              <p:spPr>
-                <a:xfrm rot="0" flipH="false" flipV="false">
-                  <a:off x="6994802" y="1429602"/>
-                  <a:ext cx="288000" cy="0"/>
-                </a:xfrm>
-                <a:prstGeom prst="line">
-                  <a:avLst/>
-                </a:prstGeom>
-                <a:ln w="19050">
-                  <a:solidFill>
-                    <a:srgbClr val="000000"/>
-                  </a:solidFill>
-                  <a:tailEnd type="triangle" w="med" len="med"/>
-                </a:ln>
-              </p:spPr>
-              <p:style>
-                <a:lnRef idx="2">
-                  <a:schemeClr val="accent1"/>
-                </a:lnRef>
-                <a:fillRef idx="0">
-                  <a:schemeClr val="accent1"/>
-                </a:fillRef>
-                <a:effectRef idx="1">
-                  <a:schemeClr val="accent1"/>
-                </a:effectRef>
-                <a:fontRef idx="minor">
-                  <a:schemeClr val="tx1"/>
-                </a:fontRef>
-              </p:style>
-            </p:cxnSp>
             <p:sp>
               <p:nvSpPr>
-                <p:cNvPr id="78" name="Rounded Rectangle 32"/>
+                <p:cNvPr id="63" name="Rounded Rectangle 37"/>
                 <p:cNvSpPr/>
                 <p:nvPr/>
               </p:nvSpPr>
               <p:spPr>
                 <a:xfrm rot="0" flipH="false" flipV="false">
-                  <a:off x="3129036" y="3126157"/>
-                  <a:ext cx="812248" cy="381198"/>
+                  <a:off x="2924800" y="2808000"/>
+                  <a:ext cx="720000" cy="432000"/>
                 </a:xfrm>
                 <a:prstGeom prst="roundRect">
-                  <a:avLst>
-                    <a:gd name="adj" fmla="val 16667"/>
-                  </a:avLst>
+                  <a:avLst/>
+                </a:prstGeom>
+                <a:solidFill>
+                  <a:srgbClr val="E8E0F0"/>
+                </a:solidFill>
+                <a:ln w="19050">
+                  <a:solidFill>
+                    <a:srgbClr val="7B68EE"/>
+                  </a:solidFill>
+                </a:ln>
+              </p:spPr>
+              <p:style>
+                <a:lnRef idx="1">
+                  <a:schemeClr val="accent1"/>
+                </a:lnRef>
+                <a:fillRef idx="3">
+                  <a:schemeClr val="accent1"/>
+                </a:fillRef>
+                <a:effectRef idx="2">
+                  <a:schemeClr val="accent1"/>
+                </a:effectRef>
+                <a:fontRef idx="minor">
+                  <a:schemeClr val="lt1"/>
+                </a:fontRef>
+              </p:style>
+              <p:txBody>
+                <a:bodyPr wrap="square" rtlCol="false" anchor="ctr"/>
+                <a:lstStyle/>
+                <a:p>
+                  <a:pPr lvl="0" algn="ctr"/>
+                  <a:r>
+                    <a:rPr lang="en-US" sz="900" b="true">
+                      <a:solidFill>
+                        <a:srgbClr val="000000">
+                          <a:alpha val="100000"/>
+                        </a:srgbClr>
+                      </a:solidFill>
+                      <a:latin typeface="Arial"/>
+                      <a:ea typeface="宋体"/>
+                      <a:cs typeface="+mn-cs"/>
+                    </a:rPr>
+                    <a:t>3</a:t>
+                  </a:r>
+                  <a:r>
+                    <a:rPr sz="900" b="true">
+                      <a:solidFill>
+                        <a:srgbClr val="000000">
+                          <a:alpha val="100000"/>
+                        </a:srgbClr>
+                      </a:solidFill>
+                      <a:latin typeface="Arial"/>
+                      <a:ea typeface="宋体"/>
+                      <a:cs typeface="+mn-cs"/>
+                    </a:rPr>
+                    <a:t>×</a:t>
+                  </a:r>
+                  <a:r>
+                    <a:rPr lang="en-US" sz="900" b="true">
+                      <a:solidFill>
+                        <a:srgbClr val="000000">
+                          <a:alpha val="100000"/>
+                        </a:srgbClr>
+                      </a:solidFill>
+                      <a:latin typeface="Arial"/>
+                      <a:ea typeface="宋体"/>
+                      <a:cs typeface="+mn-cs"/>
+                    </a:rPr>
+                    <a:t>3</a:t>
+                  </a:r>
+                  <a:r>
+                    <a:rPr sz="900" b="true">
+                      <a:solidFill>
+                        <a:srgbClr val="000000">
+                          <a:alpha val="100000"/>
+                        </a:srgbClr>
+                      </a:solidFill>
+                      <a:latin typeface="Arial"/>
+                      <a:ea typeface="宋体"/>
+                      <a:cs typeface="+mn-cs"/>
+                    </a:rPr>
+                    <a:t> Conv</a:t>
+                  </a:r>
+                  <a:endParaRPr sz="1800">
+                    <a:solidFill>
+                      <a:schemeClr val="lt1">
+                        <a:alpha val="100000"/>
+                      </a:schemeClr>
+                    </a:solidFill>
+                    <a:latin typeface="Calibri"/>
+                    <a:ea typeface="宋体"/>
+                    <a:cs typeface="+mn-cs"/>
+                  </a:endParaRPr>
+                </a:p>
+                <a:p>
+                  <a:pPr lvl="0" algn="ctr"/>
+                  <a:r>
+                    <a:rPr lang="en-US" sz="900" b="true">
+                      <a:solidFill>
+                        <a:srgbClr val="000000">
+                          <a:alpha val="100000"/>
+                        </a:srgbClr>
+                      </a:solidFill>
+                      <a:latin typeface="Arial"/>
+                      <a:ea typeface="宋体"/>
+                      <a:cs typeface="+mn-cs"/>
+                    </a:rPr>
+                    <a:t>rate 36</a:t>
+                  </a:r>
+                  <a:endParaRPr/>
+                </a:p>
+              </p:txBody>
+            </p:sp>
+            <p:sp>
+              <p:nvSpPr>
+                <p:cNvPr id="64" name="Rounded Rectangle 37"/>
+                <p:cNvSpPr/>
+                <p:nvPr/>
+              </p:nvSpPr>
+              <p:spPr>
+                <a:xfrm rot="0" flipH="false" flipV="false">
+                  <a:off x="2924800" y="2150800"/>
+                  <a:ext cx="720000" cy="432000"/>
+                </a:xfrm>
+                <a:prstGeom prst="roundRect">
+                  <a:avLst/>
+                </a:prstGeom>
+                <a:solidFill>
+                  <a:srgbClr val="E8E0F0"/>
+                </a:solidFill>
+                <a:ln w="19050">
+                  <a:solidFill>
+                    <a:srgbClr val="7B68EE"/>
+                  </a:solidFill>
+                </a:ln>
+              </p:spPr>
+              <p:style>
+                <a:lnRef idx="1">
+                  <a:schemeClr val="accent1"/>
+                </a:lnRef>
+                <a:fillRef idx="3">
+                  <a:schemeClr val="accent1"/>
+                </a:fillRef>
+                <a:effectRef idx="2">
+                  <a:schemeClr val="accent1"/>
+                </a:effectRef>
+                <a:fontRef idx="minor">
+                  <a:schemeClr val="lt1"/>
+                </a:fontRef>
+              </p:style>
+              <p:txBody>
+                <a:bodyPr wrap="square" rtlCol="false" anchor="ctr"/>
+                <a:lstStyle/>
+                <a:p>
+                  <a:pPr lvl="0" algn="ctr"/>
+                  <a:r>
+                    <a:rPr lang="en-US" sz="900" b="true">
+                      <a:solidFill>
+                        <a:srgbClr val="000000">
+                          <a:alpha val="100000"/>
+                        </a:srgbClr>
+                      </a:solidFill>
+                      <a:latin typeface="Arial"/>
+                      <a:ea typeface="宋体"/>
+                      <a:cs typeface="+mn-cs"/>
+                    </a:rPr>
+                    <a:t>3</a:t>
+                  </a:r>
+                  <a:r>
+                    <a:rPr sz="900" b="true">
+                      <a:solidFill>
+                        <a:srgbClr val="000000">
+                          <a:alpha val="100000"/>
+                        </a:srgbClr>
+                      </a:solidFill>
+                      <a:latin typeface="Arial"/>
+                      <a:ea typeface="宋体"/>
+                      <a:cs typeface="+mn-cs"/>
+                    </a:rPr>
+                    <a:t>×</a:t>
+                  </a:r>
+                  <a:r>
+                    <a:rPr lang="en-US" sz="900" b="true">
+                      <a:solidFill>
+                        <a:srgbClr val="000000">
+                          <a:alpha val="100000"/>
+                        </a:srgbClr>
+                      </a:solidFill>
+                      <a:latin typeface="Arial"/>
+                      <a:ea typeface="宋体"/>
+                      <a:cs typeface="+mn-cs"/>
+                    </a:rPr>
+                    <a:t>3</a:t>
+                  </a:r>
+                  <a:r>
+                    <a:rPr sz="900" b="true">
+                      <a:solidFill>
+                        <a:srgbClr val="000000">
+                          <a:alpha val="100000"/>
+                        </a:srgbClr>
+                      </a:solidFill>
+                      <a:latin typeface="Arial"/>
+                      <a:ea typeface="宋体"/>
+                      <a:cs typeface="+mn-cs"/>
+                    </a:rPr>
+                    <a:t> Conv</a:t>
+                  </a:r>
+                  <a:endParaRPr sz="1800">
+                    <a:solidFill>
+                      <a:schemeClr val="lt1">
+                        <a:alpha val="100000"/>
+                      </a:schemeClr>
+                    </a:solidFill>
+                    <a:latin typeface="Calibri"/>
+                    <a:ea typeface="宋体"/>
+                    <a:cs typeface="+mn-cs"/>
+                  </a:endParaRPr>
+                </a:p>
+                <a:p>
+                  <a:pPr lvl="0" algn="ctr"/>
+                  <a:r>
+                    <a:rPr lang="en-US" sz="900" b="true">
+                      <a:solidFill>
+                        <a:srgbClr val="000000">
+                          <a:alpha val="100000"/>
+                        </a:srgbClr>
+                      </a:solidFill>
+                      <a:latin typeface="Arial"/>
+                      <a:ea typeface="宋体"/>
+                      <a:cs typeface="+mn-cs"/>
+                    </a:rPr>
+                    <a:t>rate 24</a:t>
+                  </a:r>
+                  <a:endParaRPr/>
+                </a:p>
+              </p:txBody>
+            </p:sp>
+            <p:sp>
+              <p:nvSpPr>
+                <p:cNvPr id="65" name="Rounded Rectangle 37"/>
+                <p:cNvSpPr/>
+                <p:nvPr/>
+              </p:nvSpPr>
+              <p:spPr>
+                <a:xfrm rot="0" flipH="false" flipV="false">
+                  <a:off x="2924800" y="1493600"/>
+                  <a:ext cx="720000" cy="432000"/>
+                </a:xfrm>
+                <a:prstGeom prst="roundRect">
+                  <a:avLst/>
                 </a:prstGeom>
                 <a:solidFill>
                   <a:srgbClr val="E8E0F0"/>
@@ -6847,53 +6101,597 @@
                     </a:spcAft>
                   </a:pPr>
                   <a:r>
+                    <a:rPr lang="en-US" sz="900" b="true">
+                      <a:solidFill>
+                        <a:srgbClr val="000000">
+                          <a:alpha val="100000"/>
+                        </a:srgbClr>
+                      </a:solidFill>
+                      <a:latin typeface="Arial"/>
+                      <a:ea typeface="宋体"/>
+                      <a:cs typeface="+mn-cs"/>
+                    </a:rPr>
+                    <a:t>3</a:t>
+                  </a:r>
+                  <a:r>
                     <a:rPr sz="900" b="true">
                       <a:solidFill>
-                        <a:srgbClr val="000000"/>
+                        <a:srgbClr val="000000">
+                          <a:alpha val="100000"/>
+                        </a:srgbClr>
                       </a:solidFill>
                       <a:latin typeface="Arial"/>
+                      <a:ea typeface="宋体"/>
+                      <a:cs typeface="+mn-cs"/>
                     </a:rPr>
-                    <a:t>Upsample
-×4</a:t>
+                    <a:t>×</a:t>
+                  </a:r>
+                  <a:r>
+                    <a:rPr lang="en-US" sz="900" b="true">
+                      <a:solidFill>
+                        <a:srgbClr val="000000">
+                          <a:alpha val="100000"/>
+                        </a:srgbClr>
+                      </a:solidFill>
+                      <a:latin typeface="Arial"/>
+                      <a:ea typeface="宋体"/>
+                      <a:cs typeface="+mn-cs"/>
+                    </a:rPr>
+                    <a:t>3</a:t>
+                  </a:r>
+                  <a:r>
+                    <a:rPr sz="900" b="true">
+                      <a:solidFill>
+                        <a:srgbClr val="000000">
+                          <a:alpha val="100000"/>
+                        </a:srgbClr>
+                      </a:solidFill>
+                      <a:latin typeface="Arial"/>
+                      <a:ea typeface="宋体"/>
+                      <a:cs typeface="+mn-cs"/>
+                    </a:rPr>
+                    <a:t> Conv</a:t>
+                  </a:r>
+                  <a:endParaRPr/>
+                </a:p>
+                <a:p>
+                  <a:pPr algn="ctr">
+                    <a:spcBef>
+                      <a:spcPts val="0"/>
+                    </a:spcBef>
+                    <a:spcAft>
+                      <a:spcPts val="0"/>
+                    </a:spcAft>
+                  </a:pPr>
+                  <a:r>
+                    <a:rPr lang="en-US" sz="900" b="true">
+                      <a:solidFill>
+                        <a:srgbClr val="000000">
+                          <a:alpha val="100000"/>
+                        </a:srgbClr>
+                      </a:solidFill>
+                      <a:latin typeface="Arial"/>
+                      <a:ea typeface="宋体"/>
+                      <a:cs typeface="+mn-cs"/>
+                    </a:rPr>
+                    <a:t>rate 12</a:t>
+                  </a:r>
+                  <a:endParaRPr/>
+                </a:p>
+              </p:txBody>
+            </p:sp>
+            <p:sp>
+              <p:nvSpPr>
+                <p:cNvPr id="66" name="Rounded Rectangle 37"/>
+                <p:cNvSpPr/>
+                <p:nvPr/>
+              </p:nvSpPr>
+              <p:spPr>
+                <a:xfrm rot="0" flipH="false" flipV="false">
+                  <a:off x="2924800" y="3465200"/>
+                  <a:ext cx="720000" cy="432000"/>
+                </a:xfrm>
+                <a:prstGeom prst="roundRect">
+                  <a:avLst/>
+                </a:prstGeom>
+                <a:solidFill>
+                  <a:srgbClr val="E8E0F0"/>
+                </a:solidFill>
+                <a:ln w="19050">
+                  <a:solidFill>
+                    <a:srgbClr val="7B68EE"/>
+                  </a:solidFill>
+                </a:ln>
+              </p:spPr>
+              <p:style>
+                <a:lnRef idx="1">
+                  <a:schemeClr val="accent1"/>
+                </a:lnRef>
+                <a:fillRef idx="3">
+                  <a:schemeClr val="accent1"/>
+                </a:fillRef>
+                <a:effectRef idx="2">
+                  <a:schemeClr val="accent1"/>
+                </a:effectRef>
+                <a:fontRef idx="minor">
+                  <a:schemeClr val="lt1"/>
+                </a:fontRef>
+              </p:style>
+              <p:txBody>
+                <a:bodyPr wrap="square" rtlCol="false" anchor="ctr"/>
+                <a:lstStyle/>
+                <a:p>
+                  <a:pPr algn="ctr">
+                    <a:spcBef>
+                      <a:spcPts val="0"/>
+                    </a:spcBef>
+                    <a:spcAft>
+                      <a:spcPts val="0"/>
+                    </a:spcAft>
+                  </a:pPr>
+                  <a:r>
+                    <a:rPr lang="en-US" sz="900" b="true">
+                      <a:solidFill>
+                        <a:srgbClr val="000000">
+                          <a:alpha val="100000"/>
+                        </a:srgbClr>
+                      </a:solidFill>
+                      <a:latin typeface="Arial"/>
+                      <a:ea typeface="宋体"/>
+                      <a:cs typeface="+mn-cs"/>
+                    </a:rPr>
+                    <a:t>Image</a:t>
+                  </a:r>
+                  <a:endParaRPr/>
+                </a:p>
+                <a:p>
+                  <a:pPr algn="ctr">
+                    <a:spcBef>
+                      <a:spcPts val="0"/>
+                    </a:spcBef>
+                    <a:spcAft>
+                      <a:spcPts val="0"/>
+                    </a:spcAft>
+                  </a:pPr>
+                  <a:r>
+                    <a:rPr lang="en-US" sz="900" b="true">
+                      <a:solidFill>
+                        <a:srgbClr val="000000">
+                          <a:alpha val="100000"/>
+                        </a:srgbClr>
+                      </a:solidFill>
+                      <a:latin typeface="Arial"/>
+                      <a:ea typeface="宋体"/>
+                      <a:cs typeface="+mn-cs"/>
+                    </a:rPr>
+                    <a:t>Pooling</a:t>
+                  </a:r>
+                  <a:endParaRPr/>
+                </a:p>
+              </p:txBody>
+            </p:sp>
+            <p:sp>
+              <p:nvSpPr>
+                <p:cNvPr id="67" name=""/>
+                <p:cNvSpPr/>
+                <p:nvPr/>
+              </p:nvSpPr>
+              <p:spPr>
+                <a:xfrm rot="0" flipH="false" flipV="false">
+                  <a:off x="2048934" y="1052400"/>
+                  <a:ext cx="685800" cy="2628799"/>
+                </a:xfrm>
+                <a:prstGeom prst="leftBrace">
+                  <a:avLst>
+                    <a:gd name="adj1" fmla="val 8333"/>
+                    <a:gd name="adj2" fmla="val 49033"/>
+                  </a:avLst>
+                </a:prstGeom>
+                <a:ln w="12700">
+                  <a:solidFill>
+                    <a:srgbClr val="5C5C5C">
+                      <a:alpha val="100000"/>
+                    </a:srgbClr>
+                  </a:solidFill>
+                  <a:prstDash val="solid"/>
+                  <a:miter lim="800000"/>
+                </a:ln>
+              </p:spPr>
+              <p:txBody>
+                <a:bodyPr anchor="ctr"/>
+                <a:p>
+                  <a:pPr algn="ctr"/>
+                  <a:endParaRPr/>
+                </a:p>
+              </p:txBody>
+            </p:sp>
+            <p:sp>
+              <p:nvSpPr>
+                <p:cNvPr id="68" name="Rounded Rectangle 5"/>
+                <p:cNvSpPr/>
+                <p:nvPr/>
+              </p:nvSpPr>
+              <p:spPr>
+                <a:xfrm rot="0" flipH="false" flipV="false">
+                  <a:off x="730268" y="2042800"/>
+                  <a:ext cx="1230200" cy="648000"/>
+                </a:xfrm>
+                <a:prstGeom prst="roundRect">
+                  <a:avLst/>
+                </a:prstGeom>
+                <a:solidFill>
+                  <a:srgbClr val="D6E6F2"/>
+                </a:solidFill>
+                <a:ln w="19050">
+                  <a:solidFill>
+                    <a:srgbClr val="4A7BA7"/>
+                  </a:solidFill>
+                </a:ln>
+              </p:spPr>
+              <p:style>
+                <a:lnRef idx="1">
+                  <a:schemeClr val="accent1"/>
+                </a:lnRef>
+                <a:fillRef idx="3">
+                  <a:schemeClr val="accent1"/>
+                </a:fillRef>
+                <a:effectRef idx="2">
+                  <a:schemeClr val="accent1"/>
+                </a:effectRef>
+                <a:fontRef idx="minor">
+                  <a:schemeClr val="lt1"/>
+                </a:fontRef>
+              </p:style>
+              <p:txBody>
+                <a:bodyPr wrap="square" rtlCol="false" anchor="ctr"/>
+                <a:lstStyle/>
+                <a:p>
+                  <a:pPr algn="ctr">
+                    <a:spcBef>
+                      <a:spcPts val="0"/>
+                    </a:spcBef>
+                    <a:spcAft>
+                      <a:spcPts val="0"/>
+                    </a:spcAft>
+                  </a:pPr>
+                  <a:r>
+                    <a:rPr lang="en-US" sz="1100" b="true">
+                      <a:solidFill>
+                        <a:srgbClr val="000000">
+                          <a:alpha val="100000"/>
+                        </a:srgbClr>
+                      </a:solidFill>
+                      <a:latin typeface="Arial"/>
+                      <a:ea typeface="宋体"/>
+                      <a:cs typeface="+mn-cs"/>
+                    </a:rPr>
+                    <a:t>ResNet18-V1c</a:t>
+                  </a:r>
+                  <a:endParaRPr/>
+                </a:p>
+                <a:p>
+                  <a:pPr algn="ctr">
+                    <a:spcBef>
+                      <a:spcPts val="0"/>
+                    </a:spcBef>
+                    <a:spcAft>
+                      <a:spcPts val="0"/>
+                    </a:spcAft>
+                  </a:pPr>
+                  <a:r>
+                    <a:rPr lang="en-US" sz="800" b="false">
+                      <a:solidFill>
+                        <a:srgbClr val="646464">
+                          <a:alpha val="100000"/>
+                        </a:srgbClr>
+                      </a:solidFill>
+                      <a:latin typeface="Arial"/>
+                      <a:ea typeface="宋体"/>
+                      <a:cs typeface="+mn-cs"/>
+                    </a:rPr>
+                    <a:t>(Backbone) </a:t>
                   </a:r>
                   <a:endParaRPr/>
                 </a:p>
               </p:txBody>
             </p:sp>
           </p:grpSp>
+          <p:sp>
+            <p:nvSpPr>
+              <p:cNvPr id="69" name=""/>
+              <p:cNvSpPr/>
+              <p:nvPr/>
+            </p:nvSpPr>
+            <p:spPr>
+              <a:xfrm rot="0" flipH="false" flipV="false">
+                <a:off x="718189" y="279768"/>
+                <a:ext cx="7829112" cy="2362200"/>
+              </a:xfrm>
+              <a:prstGeom prst="roundRect">
+                <a:avLst/>
+              </a:prstGeom>
+              <a:noFill/>
+              <a:ln w="12700">
+                <a:solidFill>
+                  <a:srgbClr val="5C5C5C">
+                    <a:alpha val="100000"/>
+                  </a:srgbClr>
+                </a:solidFill>
+                <a:prstDash val="sysDash"/>
+                <a:miter lim="800000"/>
+              </a:ln>
+            </p:spPr>
+            <p:txBody>
+              <a:bodyPr anchor="ctr"/>
+              <a:p>
+                <a:pPr algn="ctr"/>
+                <a:endParaRPr/>
+              </a:p>
+            </p:txBody>
+          </p:sp>
+          <p:sp>
+            <p:nvSpPr>
+              <p:cNvPr id="70" name="TextBox 51"/>
+              <p:cNvSpPr txBox="true"/>
+              <p:nvPr/>
+            </p:nvSpPr>
+            <p:spPr>
+              <a:xfrm rot="0" flipH="false" flipV="false">
+                <a:off x="696530" y="314601"/>
+                <a:ext cx="1080000" cy="180000"/>
+              </a:xfrm>
+              <a:prstGeom prst="rect">
+                <a:avLst/>
+              </a:prstGeom>
+              <a:noFill/>
+            </p:spPr>
+            <p:txBody>
+              <a:bodyPr wrap="square">
+                <a:spAutoFit/>
+              </a:bodyPr>
+              <a:lstStyle/>
+              <a:p>
+                <a:pPr algn="ctr">
+                  <a:defRPr sz="1400" b="true">
+                    <a:solidFill>
+                      <a:srgbClr val="2E75B6"/>
+                    </a:solidFill>
+                    <a:latin typeface="Arial"/>
+                  </a:defRPr>
+                </a:pPr>
+                <a:r>
+                  <a:rPr/>
+                  <a:t>Encoder</a:t>
+                </a:r>
+                <a:endParaRPr/>
+              </a:p>
+            </p:txBody>
+          </p:sp>
+          <p:sp>
+            <p:nvSpPr>
+              <p:cNvPr id="71" name=""/>
+              <p:cNvSpPr/>
+              <p:nvPr/>
+            </p:nvSpPr>
+            <p:spPr>
+              <a:xfrm rot="0" flipH="false" flipV="false">
+                <a:off x="3822903" y="531251"/>
+                <a:ext cx="855133" cy="1859232"/>
+              </a:xfrm>
+              <a:prstGeom prst="rightBrace">
+                <a:avLst>
+                  <a:gd name="adj1" fmla="val 8333"/>
+                  <a:gd name="adj2" fmla="val 49089"/>
+                </a:avLst>
+              </a:prstGeom>
+              <a:ln w="12700">
+                <a:solidFill>
+                  <a:srgbClr val="5C5C5C">
+                    <a:alpha val="100000"/>
+                  </a:srgbClr>
+                </a:solidFill>
+                <a:prstDash val="solid"/>
+                <a:miter lim="800000"/>
+              </a:ln>
+            </p:spPr>
+            <p:txBody>
+              <a:bodyPr anchor="ctr"/>
+              <a:p>
+                <a:pPr algn="ctr"/>
+                <a:endParaRPr/>
+              </a:p>
+            </p:txBody>
+          </p:sp>
+          <p:sp>
+            <p:nvSpPr>
+              <p:cNvPr id="72" name="Rounded Rectangle 34"/>
+              <p:cNvSpPr/>
+              <p:nvPr/>
+            </p:nvSpPr>
+            <p:spPr>
+              <a:xfrm rot="0" flipH="false" flipV="false">
+                <a:off x="4737509" y="1194999"/>
+                <a:ext cx="720000" cy="432000"/>
+              </a:xfrm>
+              <a:prstGeom prst="roundRect">
+                <a:avLst/>
+              </a:prstGeom>
+              <a:solidFill>
+                <a:srgbClr val="E8E0F0"/>
+              </a:solidFill>
+              <a:ln w="19050">
+                <a:solidFill>
+                  <a:srgbClr val="7B68EE"/>
+                </a:solidFill>
+              </a:ln>
+            </p:spPr>
+            <p:style>
+              <a:lnRef idx="1">
+                <a:schemeClr val="accent1"/>
+              </a:lnRef>
+              <a:fillRef idx="3">
+                <a:schemeClr val="accent1"/>
+              </a:fillRef>
+              <a:effectRef idx="2">
+                <a:schemeClr val="accent1"/>
+              </a:effectRef>
+              <a:fontRef idx="minor">
+                <a:schemeClr val="lt1"/>
+              </a:fontRef>
+            </p:style>
+            <p:txBody>
+              <a:bodyPr wrap="square" rtlCol="false" anchor="ctr"/>
+              <a:lstStyle/>
+              <a:p>
+                <a:pPr algn="ctr">
+                  <a:spcBef>
+                    <a:spcPts val="0"/>
+                  </a:spcBef>
+                  <a:spcAft>
+                    <a:spcPts val="0"/>
+                  </a:spcAft>
+                </a:pPr>
+                <a:r>
+                  <a:rPr sz="1000" b="true">
+                    <a:solidFill>
+                      <a:srgbClr val="000000"/>
+                    </a:solidFill>
+                    <a:latin typeface="Arial"/>
+                  </a:rPr>
+                  <a:t>Concat</a:t>
+                </a:r>
+                <a:endParaRPr/>
+              </a:p>
+            </p:txBody>
+          </p:sp>
           <p:cxnSp>
             <p:nvCxnSpPr>
-              <p:cNvPr id="79" name=""/>
+              <p:cNvPr id="73" name="Connector 9"/>
               <p:cNvCxnSpPr/>
               <p:nvPr/>
             </p:nvCxnSpPr>
             <p:spPr>
               <a:xfrm rot="0" flipH="false" flipV="false">
-                <a:off x="8153400" y="1659089"/>
-                <a:ext cx="8433" cy="1668062"/>
+                <a:off x="5516982" y="1438438"/>
+                <a:ext cx="288000" cy="0"/>
               </a:xfrm>
-              <a:prstGeom prst="straightConnector1"/>
-              <a:ln w="25400">
+              <a:prstGeom prst="line">
+                <a:avLst/>
+              </a:prstGeom>
+              <a:ln w="19050">
                 <a:solidFill>
-                  <a:srgbClr val="000000">
-                    <a:alpha val="100000"/>
-                  </a:srgbClr>
+                  <a:srgbClr val="000000"/>
                 </a:solidFill>
-                <a:prstDash val="solid"/>
-                <a:headEnd/>
-                <a:tailEnd/>
+                <a:tailEnd type="triangle" w="med" len="med"/>
               </a:ln>
             </p:spPr>
+            <p:style>
+              <a:lnRef idx="2">
+                <a:schemeClr val="accent1"/>
+              </a:lnRef>
+              <a:fillRef idx="0">
+                <a:schemeClr val="accent1"/>
+              </a:fillRef>
+              <a:effectRef idx="1">
+                <a:schemeClr val="accent1"/>
+              </a:effectRef>
+              <a:fontRef idx="minor">
+                <a:schemeClr val="tx1"/>
+              </a:fontRef>
+            </p:style>
           </p:cxnSp>
           <p:sp>
             <p:nvSpPr>
-              <p:cNvPr id="80" name="Rounded Rectangle 37"/>
+              <p:cNvPr id="74" name="Rounded Rectangle 20"/>
               <p:cNvSpPr/>
               <p:nvPr/>
             </p:nvSpPr>
             <p:spPr>
               <a:xfrm rot="0" flipH="false" flipV="false">
-                <a:off x="1693760" y="4350068"/>
+                <a:off x="5864455" y="1033602"/>
+                <a:ext cx="1007999" cy="792000"/>
+              </a:xfrm>
+              <a:prstGeom prst="roundRect">
+                <a:avLst/>
+              </a:prstGeom>
+              <a:solidFill>
+                <a:srgbClr val="E8F5E9"/>
+              </a:solidFill>
+              <a:ln w="31750">
+                <a:solidFill>
+                  <a:srgbClr val="4CAF50"/>
+                </a:solidFill>
+              </a:ln>
+            </p:spPr>
+            <p:style>
+              <a:lnRef idx="1">
+                <a:schemeClr val="accent1"/>
+              </a:lnRef>
+              <a:fillRef idx="3">
+                <a:schemeClr val="accent1"/>
+              </a:fillRef>
+              <a:effectRef idx="2">
+                <a:schemeClr val="accent1"/>
+              </a:effectRef>
+              <a:fontRef idx="minor">
+                <a:schemeClr val="lt1"/>
+              </a:fontRef>
+            </p:style>
+            <p:txBody>
+              <a:bodyPr wrap="square" rtlCol="false" anchor="ctr"/>
+              <a:lstStyle/>
+              <a:p>
+                <a:pPr algn="ctr">
+                  <a:spcBef>
+                    <a:spcPts val="0"/>
+                  </a:spcBef>
+                  <a:spcAft>
+                    <a:spcPts val="0"/>
+                  </a:spcAft>
+                </a:pPr>
+                <a:r>
+                  <a:rPr sz="1100" b="true">
+                    <a:solidFill>
+                      <a:srgbClr val="1B5E20"/>
+                    </a:solidFill>
+                    <a:latin typeface="Arial"/>
+                  </a:rPr>
+                  <a:t>TR Module</a:t>
+                </a:r>
+                <a:endParaRPr/>
+              </a:p>
+              <a:p>
+                <a:pPr algn="ctr">
+                  <a:spcBef>
+                    <a:spcPts val="0"/>
+                  </a:spcBef>
+                  <a:spcAft>
+                    <a:spcPts val="0"/>
+                  </a:spcAft>
+                </a:pPr>
+                <a:r>
+                  <a:rPr sz="800" b="false">
+                    <a:solidFill>
+                      <a:srgbClr val="646464"/>
+                    </a:solidFill>
+                    <a:latin typeface="Arial"/>
+                  </a:rPr>
+                  <a:t>Bi-Level Routing
+Attention</a:t>
+                </a:r>
+                <a:endParaRPr/>
+              </a:p>
+            </p:txBody>
+          </p:sp>
+          <p:sp>
+            <p:nvSpPr>
+              <p:cNvPr id="75" name="Rounded Rectangle 37"/>
+              <p:cNvSpPr/>
+              <p:nvPr/>
+            </p:nvSpPr>
+            <p:spPr>
+              <a:xfrm rot="0" flipH="false" flipV="false">
+                <a:off x="7405149" y="1280522"/>
                 <a:ext cx="642611" cy="298162"/>
               </a:xfrm>
               <a:prstGeom prst="roundRect">
@@ -6949,122 +6747,14 @@
           </p:sp>
           <p:cxnSp>
             <p:nvCxnSpPr>
-              <p:cNvPr id="81" name="Connector 9"/>
+              <p:cNvPr id="76" name="Connector 9"/>
               <p:cNvCxnSpPr/>
               <p:nvPr/>
             </p:nvCxnSpPr>
             <p:spPr>
               <a:xfrm rot="0" flipH="false" flipV="false">
-                <a:off x="2463174" y="4499149"/>
-                <a:ext cx="923038" cy="0"/>
-              </a:xfrm>
-              <a:prstGeom prst="line">
-                <a:avLst/>
-              </a:prstGeom>
-              <a:ln w="19050">
-                <a:solidFill>
-                  <a:srgbClr val="000000"/>
-                </a:solidFill>
-                <a:tailEnd type="triangle" w="med" len="med"/>
-              </a:ln>
-            </p:spPr>
-            <p:style>
-              <a:lnRef idx="2">
-                <a:schemeClr val="accent1"/>
-              </a:lnRef>
-              <a:fillRef idx="0">
-                <a:schemeClr val="accent1"/>
-              </a:fillRef>
-              <a:effectRef idx="1">
-                <a:schemeClr val="accent1"/>
-              </a:effectRef>
-              <a:fontRef idx="minor">
-                <a:schemeClr val="tx1"/>
-              </a:fontRef>
-            </p:style>
-          </p:cxnSp>
-          <p:cxnSp>
-            <p:nvCxnSpPr>
-              <p:cNvPr id="82" name="Connector 9"/>
-              <p:cNvCxnSpPr/>
-              <p:nvPr/>
-            </p:nvCxnSpPr>
-            <p:spPr>
-              <a:xfrm rot="0" flipH="false" flipV="false">
-                <a:off x="3992360" y="3576111"/>
-                <a:ext cx="0" cy="644287"/>
-              </a:xfrm>
-              <a:prstGeom prst="line">
-                <a:avLst/>
-              </a:prstGeom>
-              <a:ln w="19050">
-                <a:solidFill>
-                  <a:srgbClr val="000000"/>
-                </a:solidFill>
-                <a:tailEnd type="triangle" w="med" len="med"/>
-              </a:ln>
-            </p:spPr>
-            <p:style>
-              <a:lnRef idx="2">
-                <a:schemeClr val="accent1"/>
-              </a:lnRef>
-              <a:fillRef idx="0">
-                <a:schemeClr val="accent1"/>
-              </a:fillRef>
-              <a:effectRef idx="1">
-                <a:schemeClr val="accent1"/>
-              </a:effectRef>
-              <a:fontRef idx="minor">
-                <a:schemeClr val="tx1"/>
-              </a:fontRef>
-            </p:style>
-          </p:cxnSp>
-          <p:cxnSp>
-            <p:nvCxnSpPr>
-              <p:cNvPr id="83" name="Connector 9"/>
-              <p:cNvCxnSpPr/>
-              <p:nvPr/>
-            </p:nvCxnSpPr>
-            <p:spPr>
-              <a:xfrm rot="0" flipH="false" flipV="false">
-                <a:off x="2015066" y="1789128"/>
-                <a:ext cx="0" cy="2430902"/>
-              </a:xfrm>
-              <a:prstGeom prst="line">
-                <a:avLst/>
-              </a:prstGeom>
-              <a:ln w="19050">
-                <a:solidFill>
-                  <a:srgbClr val="000000"/>
-                </a:solidFill>
-                <a:tailEnd type="triangle" w="med" len="med"/>
-              </a:ln>
-            </p:spPr>
-            <p:style>
-              <a:lnRef idx="2">
-                <a:schemeClr val="accent1"/>
-              </a:lnRef>
-              <a:fillRef idx="0">
-                <a:schemeClr val="accent1"/>
-              </a:fillRef>
-              <a:effectRef idx="1">
-                <a:schemeClr val="accent1"/>
-              </a:effectRef>
-              <a:fontRef idx="minor">
-                <a:schemeClr val="tx1"/>
-              </a:fontRef>
-            </p:style>
-          </p:cxnSp>
-          <p:cxnSp>
-            <p:nvCxnSpPr>
-              <p:cNvPr id="84" name="Connector 9"/>
-              <p:cNvCxnSpPr/>
-              <p:nvPr/>
-            </p:nvCxnSpPr>
-            <p:spPr>
-              <a:xfrm rot="0" flipH="true" flipV="false">
-                <a:off x="4543315" y="3327102"/>
-                <a:ext cx="3618518" cy="48"/>
+                <a:off x="6994802" y="1429602"/>
+                <a:ext cx="288000" cy="0"/>
               </a:xfrm>
               <a:prstGeom prst="line">
                 <a:avLst/>
@@ -7093,252 +6783,13 @@
           </p:cxnSp>
           <p:sp>
             <p:nvSpPr>
-              <p:cNvPr id="85" name="Rounded Rectangle 34"/>
+              <p:cNvPr id="77" name="Rounded Rectangle 32"/>
               <p:cNvSpPr/>
               <p:nvPr/>
             </p:nvSpPr>
             <p:spPr>
               <a:xfrm rot="0" flipH="false" flipV="false">
-                <a:off x="3632360" y="4314554"/>
-                <a:ext cx="647742" cy="381190"/>
-              </a:xfrm>
-              <a:prstGeom prst="roundRect">
-                <a:avLst/>
-              </a:prstGeom>
-              <a:solidFill>
-                <a:srgbClr val="E8E0F0"/>
-              </a:solidFill>
-              <a:ln w="19050">
-                <a:solidFill>
-                  <a:srgbClr val="7B68EE"/>
-                </a:solidFill>
-              </a:ln>
-            </p:spPr>
-            <p:style>
-              <a:lnRef idx="1">
-                <a:schemeClr val="accent1"/>
-              </a:lnRef>
-              <a:fillRef idx="3">
-                <a:schemeClr val="accent1"/>
-              </a:fillRef>
-              <a:effectRef idx="2">
-                <a:schemeClr val="accent1"/>
-              </a:effectRef>
-              <a:fontRef idx="minor">
-                <a:schemeClr val="lt1"/>
-              </a:fontRef>
-            </p:style>
-            <p:txBody>
-              <a:bodyPr wrap="square" rtlCol="false" anchor="ctr"/>
-              <a:lstStyle/>
-              <a:p>
-                <a:pPr algn="ctr">
-                  <a:spcBef>
-                    <a:spcPts val="0"/>
-                  </a:spcBef>
-                  <a:spcAft>
-                    <a:spcPts val="0"/>
-                  </a:spcAft>
-                </a:pPr>
-                <a:r>
-                  <a:rPr sz="1000" b="true">
-                    <a:solidFill>
-                      <a:srgbClr val="000000"/>
-                    </a:solidFill>
-                    <a:latin typeface="Arial"/>
-                  </a:rPr>
-                  <a:t>Concat</a:t>
-                </a:r>
-                <a:endParaRPr/>
-              </a:p>
-            </p:txBody>
-          </p:sp>
-          <p:cxnSp>
-            <p:nvCxnSpPr>
-              <p:cNvPr id="86" name="Connector 9"/>
-              <p:cNvCxnSpPr/>
-              <p:nvPr/>
-            </p:nvCxnSpPr>
-            <p:spPr>
-              <a:xfrm rot="0" flipH="false" flipV="false">
-                <a:off x="4398484" y="4505149"/>
-                <a:ext cx="923038" cy="0"/>
-              </a:xfrm>
-              <a:prstGeom prst="line">
-                <a:avLst/>
-              </a:prstGeom>
-              <a:ln w="19050">
-                <a:solidFill>
-                  <a:srgbClr val="000000"/>
-                </a:solidFill>
-                <a:tailEnd type="triangle" w="med" len="med"/>
-              </a:ln>
-            </p:spPr>
-            <p:style>
-              <a:lnRef idx="2">
-                <a:schemeClr val="accent1"/>
-              </a:lnRef>
-              <a:fillRef idx="0">
-                <a:schemeClr val="accent1"/>
-              </a:fillRef>
-              <a:effectRef idx="1">
-                <a:schemeClr val="accent1"/>
-              </a:effectRef>
-              <a:fontRef idx="minor">
-                <a:schemeClr val="tx1"/>
-              </a:fontRef>
-            </p:style>
-          </p:cxnSp>
-          <p:sp>
-            <p:nvSpPr>
-              <p:cNvPr id="87" name="Rounded Rectangle 37"/>
-              <p:cNvSpPr/>
-              <p:nvPr/>
-            </p:nvSpPr>
-            <p:spPr>
-              <a:xfrm rot="0" flipH="false" flipV="false">
-                <a:off x="5439904" y="4356068"/>
-                <a:ext cx="642611" cy="298162"/>
-              </a:xfrm>
-              <a:prstGeom prst="roundRect">
-                <a:avLst/>
-              </a:prstGeom>
-              <a:solidFill>
-                <a:srgbClr val="E8E0F0"/>
-              </a:solidFill>
-              <a:ln w="19050">
-                <a:solidFill>
-                  <a:srgbClr val="7B68EE"/>
-                </a:solidFill>
-              </a:ln>
-            </p:spPr>
-            <p:style>
-              <a:lnRef idx="1">
-                <a:schemeClr val="accent1"/>
-              </a:lnRef>
-              <a:fillRef idx="3">
-                <a:schemeClr val="accent1"/>
-              </a:fillRef>
-              <a:effectRef idx="2">
-                <a:schemeClr val="accent1"/>
-              </a:effectRef>
-              <a:fontRef idx="minor">
-                <a:schemeClr val="lt1"/>
-              </a:fontRef>
-            </p:style>
-            <p:txBody>
-              <a:bodyPr wrap="square" rtlCol="false" anchor="ctr"/>
-              <a:lstStyle/>
-              <a:p>
-                <a:pPr algn="ctr">
-                  <a:spcBef>
-                    <a:spcPts val="0"/>
-                  </a:spcBef>
-                  <a:spcAft>
-                    <a:spcPts val="0"/>
-                  </a:spcAft>
-                </a:pPr>
-                <a:r>
-                  <a:rPr lang="en-US" sz="900" b="true">
-                    <a:solidFill>
-                      <a:srgbClr val="000000">
-                        <a:alpha val="100000"/>
-                      </a:srgbClr>
-                    </a:solidFill>
-                    <a:latin typeface="Arial"/>
-                    <a:ea typeface="宋体"/>
-                    <a:cs typeface="+mn-cs"/>
-                  </a:rPr>
-                  <a:t>3</a:t>
-                </a:r>
-                <a:r>
-                  <a:rPr sz="900" b="true">
-                    <a:solidFill>
-                      <a:srgbClr val="000000">
-                        <a:alpha val="100000"/>
-                      </a:srgbClr>
-                    </a:solidFill>
-                    <a:latin typeface="Arial"/>
-                    <a:ea typeface="宋体"/>
-                    <a:cs typeface="+mn-cs"/>
-                  </a:rPr>
-                  <a:t>×</a:t>
-                </a:r>
-                <a:r>
-                  <a:rPr lang="en-US" sz="900" b="true">
-                    <a:solidFill>
-                      <a:srgbClr val="000000">
-                        <a:alpha val="100000"/>
-                      </a:srgbClr>
-                    </a:solidFill>
-                    <a:latin typeface="Arial"/>
-                    <a:ea typeface="宋体"/>
-                    <a:cs typeface="+mn-cs"/>
-                  </a:rPr>
-                  <a:t>3</a:t>
-                </a:r>
-                <a:r>
-                  <a:rPr sz="900" b="true">
-                    <a:solidFill>
-                      <a:srgbClr val="000000">
-                        <a:alpha val="100000"/>
-                      </a:srgbClr>
-                    </a:solidFill>
-                    <a:latin typeface="Arial"/>
-                    <a:ea typeface="宋体"/>
-                    <a:cs typeface="+mn-cs"/>
-                  </a:rPr>
-                  <a:t> Conv</a:t>
-                </a:r>
-                <a:endParaRPr/>
-              </a:p>
-            </p:txBody>
-          </p:sp>
-          <p:cxnSp>
-            <p:nvCxnSpPr>
-              <p:cNvPr id="88" name="Connector 9"/>
-              <p:cNvCxnSpPr/>
-              <p:nvPr/>
-            </p:nvCxnSpPr>
-            <p:spPr>
-              <a:xfrm rot="0" flipH="false" flipV="false">
-                <a:off x="6208868" y="4511149"/>
-                <a:ext cx="923038" cy="0"/>
-              </a:xfrm>
-              <a:prstGeom prst="line">
-                <a:avLst/>
-              </a:prstGeom>
-              <a:ln w="19050">
-                <a:solidFill>
-                  <a:srgbClr val="000000"/>
-                </a:solidFill>
-                <a:tailEnd type="triangle" w="med" len="med"/>
-              </a:ln>
-            </p:spPr>
-            <p:style>
-              <a:lnRef idx="2">
-                <a:schemeClr val="accent1"/>
-              </a:lnRef>
-              <a:fillRef idx="0">
-                <a:schemeClr val="accent1"/>
-              </a:fillRef>
-              <a:effectRef idx="1">
-                <a:schemeClr val="accent1"/>
-              </a:effectRef>
-              <a:fontRef idx="minor">
-                <a:schemeClr val="tx1"/>
-              </a:fontRef>
-            </p:style>
-          </p:cxnSp>
-          <p:sp>
-            <p:nvSpPr>
-              <p:cNvPr id="89" name="Rounded Rectangle 32"/>
-              <p:cNvSpPr/>
-              <p:nvPr/>
-            </p:nvSpPr>
-            <p:spPr>
-              <a:xfrm rot="0" flipH="false" flipV="false">
-                <a:off x="7329654" y="4308550"/>
+                <a:off x="3129036" y="3126157"/>
                 <a:ext cx="812248" cy="381198"/>
               </a:xfrm>
               <a:prstGeom prst="roundRect">
@@ -7395,154 +6846,103 @@
               </a:p>
             </p:txBody>
           </p:sp>
-          <p:cxnSp>
-            <p:nvCxnSpPr>
-              <p:cNvPr id="90" name="Connector 9"/>
-              <p:cNvCxnSpPr/>
-              <p:nvPr/>
-            </p:nvCxnSpPr>
-            <p:spPr>
-              <a:xfrm rot="0" flipH="false" flipV="false">
-                <a:off x="8267126" y="4499149"/>
-                <a:ext cx="923038" cy="0"/>
-              </a:xfrm>
-              <a:prstGeom prst="line">
-                <a:avLst/>
-              </a:prstGeom>
-              <a:ln w="19050">
-                <a:solidFill>
-                  <a:srgbClr val="000000"/>
-                </a:solidFill>
-                <a:tailEnd type="triangle" w="med" len="med"/>
-              </a:ln>
-            </p:spPr>
-            <p:style>
-              <a:lnRef idx="2">
-                <a:schemeClr val="accent1"/>
-              </a:lnRef>
-              <a:fillRef idx="0">
-                <a:schemeClr val="accent1"/>
-              </a:fillRef>
-              <a:effectRef idx="1">
-                <a:schemeClr val="accent1"/>
-              </a:effectRef>
-              <a:fontRef idx="minor">
-                <a:schemeClr val="tx1"/>
-              </a:fontRef>
-            </p:style>
-          </p:cxnSp>
-          <p:sp>
-            <p:nvSpPr>
-              <p:cNvPr id="91" name=""/>
-              <p:cNvSpPr/>
-              <p:nvPr/>
-            </p:nvSpPr>
-            <p:spPr>
-              <a:xfrm rot="0" flipH="false" flipV="false">
-                <a:off x="1175389" y="2866939"/>
-                <a:ext cx="7829112" cy="2362200"/>
-              </a:xfrm>
-              <a:prstGeom prst="roundRect">
-                <a:avLst/>
-              </a:prstGeom>
-              <a:noFill/>
-              <a:ln w="12700">
-                <a:solidFill>
-                  <a:srgbClr val="5C5C5C">
-                    <a:alpha val="100000"/>
-                  </a:srgbClr>
-                </a:solidFill>
-                <a:prstDash val="sysDash"/>
-                <a:miter lim="800000"/>
-              </a:ln>
-            </p:spPr>
-            <p:txBody>
-              <a:bodyPr anchor="ctr"/>
-              <a:p>
-                <a:pPr algn="ctr"/>
-                <a:endParaRPr/>
-              </a:p>
-            </p:txBody>
-          </p:sp>
         </p:grpSp>
+        <p:cxnSp>
+          <p:nvCxnSpPr>
+            <p:cNvPr id="78" name=""/>
+            <p:cNvCxnSpPr/>
+            <p:nvPr/>
+          </p:nvCxnSpPr>
+          <p:spPr>
+            <a:xfrm rot="0" flipH="false" flipV="false">
+              <a:off x="8153400" y="1659089"/>
+              <a:ext cx="8433" cy="1668062"/>
+            </a:xfrm>
+            <a:prstGeom prst="straightConnector1"/>
+            <a:ln w="25400">
+              <a:solidFill>
+                <a:srgbClr val="000000">
+                  <a:alpha val="100000"/>
+                </a:srgbClr>
+              </a:solidFill>
+              <a:prstDash val="solid"/>
+              <a:headEnd/>
+              <a:tailEnd/>
+            </a:ln>
+          </p:spPr>
+        </p:cxnSp>
         <p:sp>
           <p:nvSpPr>
-            <p:cNvPr id="92" name="TextBox 51"/>
-            <p:cNvSpPr txBox="true"/>
+            <p:cNvPr id="79" name="Rounded Rectangle 37"/>
+            <p:cNvSpPr/>
             <p:nvPr/>
           </p:nvSpPr>
           <p:spPr>
             <a:xfrm rot="0" flipH="false" flipV="false">
-              <a:off x="1211913" y="3041106"/>
-              <a:ext cx="1079500" cy="304800"/>
+              <a:off x="1693760" y="4350068"/>
+              <a:ext cx="642611" cy="298162"/>
             </a:xfrm>
-            <a:prstGeom prst="rect">
+            <a:prstGeom prst="roundRect">
               <a:avLst/>
             </a:prstGeom>
-            <a:noFill/>
+            <a:solidFill>
+              <a:srgbClr val="E8E0F0"/>
+            </a:solidFill>
+            <a:ln w="19050">
+              <a:solidFill>
+                <a:srgbClr val="7B68EE"/>
+              </a:solidFill>
+            </a:ln>
           </p:spPr>
+          <p:style>
+            <a:lnRef idx="1">
+              <a:schemeClr val="accent1"/>
+            </a:lnRef>
+            <a:fillRef idx="3">
+              <a:schemeClr val="accent1"/>
+            </a:fillRef>
+            <a:effectRef idx="2">
+              <a:schemeClr val="accent1"/>
+            </a:effectRef>
+            <a:fontRef idx="minor">
+              <a:schemeClr val="lt1"/>
+            </a:fontRef>
+          </p:style>
           <p:txBody>
-            <a:bodyPr wrap="square">
-              <a:spAutoFit/>
-            </a:bodyPr>
+            <a:bodyPr wrap="square" rtlCol="false" anchor="ctr"/>
             <a:lstStyle/>
             <a:p>
               <a:pPr algn="ctr">
-                <a:defRPr sz="1400" b="true">
+                <a:spcBef>
+                  <a:spcPts val="0"/>
+                </a:spcBef>
+                <a:spcAft>
+                  <a:spcPts val="0"/>
+                </a:spcAft>
+              </a:pPr>
+              <a:r>
+                <a:rPr sz="900" b="true">
                   <a:solidFill>
-                    <a:srgbClr val="2E75B6">
-                      <a:alpha val="100000"/>
-                    </a:srgbClr>
+                    <a:srgbClr val="000000"/>
                   </a:solidFill>
                   <a:latin typeface="Arial"/>
-                  <a:ea typeface="宋体"/>
-                  <a:cs typeface="+mn-cs"/>
-                </a:defRPr>
-              </a:pPr>
-              <a:r>
-                <a:rPr lang="en-US"/>
-                <a:t>De</a:t>
-              </a:r>
-              <a:r>
-                <a:rPr/>
-                <a:t>coder</a:t>
+                </a:rPr>
+                <a:t>1×1 Conv</a:t>
               </a:r>
               <a:endParaRPr/>
             </a:p>
           </p:txBody>
         </p:sp>
-        <p:pic>
-          <p:nvPicPr>
-            <p:cNvPr id="93" name=""/>
-            <p:cNvPicPr>
-              <a:picLocks noChangeAspect="true"/>
-            </p:cNvPicPr>
-            <p:nvPr/>
-          </p:nvPicPr>
-          <p:blipFill>
-            <a:blip r:embed="rId1"/>
-            <a:stretch>
-              <a:fillRect/>
-            </a:stretch>
-          </p:blipFill>
-          <p:spPr>
-            <a:xfrm rot="0" flipH="false" flipV="false">
-              <a:off x="76972" y="1046813"/>
-              <a:ext cx="890715" cy="890715"/>
-            </a:xfrm>
-            <a:prstGeom prst="rect"/>
-          </p:spPr>
-        </p:pic>
         <p:cxnSp>
           <p:nvCxnSpPr>
-            <p:cNvPr id="94" name="Connector 9"/>
+            <p:cNvPr id="80" name="Connector 9"/>
             <p:cNvCxnSpPr/>
             <p:nvPr/>
           </p:nvCxnSpPr>
           <p:spPr>
             <a:xfrm rot="0" flipH="false" flipV="false">
-              <a:off x="1021610" y="1524234"/>
-              <a:ext cx="444307" cy="0"/>
+              <a:off x="2463174" y="4499149"/>
+              <a:ext cx="923038" cy="0"/>
             </a:xfrm>
             <a:prstGeom prst="line">
               <a:avLst/>
@@ -7569,29 +6969,614 @@
             </a:fontRef>
           </p:style>
         </p:cxnSp>
-        <p:pic>
-          <p:nvPicPr>
-            <p:cNvPr id="95" name=""/>
-            <p:cNvPicPr>
-              <a:picLocks noChangeAspect="true"/>
-            </p:cNvPicPr>
+        <p:cxnSp>
+          <p:nvCxnSpPr>
+            <p:cNvPr id="81" name="Connector 9"/>
+            <p:cNvCxnSpPr/>
             <p:nvPr/>
-          </p:nvPicPr>
-          <p:blipFill>
-            <a:blip r:embed="rId2"/>
-            <a:stretch>
-              <a:fillRect/>
-            </a:stretch>
-          </p:blipFill>
+          </p:nvCxnSpPr>
           <p:spPr>
             <a:xfrm rot="0" flipH="false" flipV="false">
-              <a:off x="9324736" y="4266280"/>
-              <a:ext cx="824307" cy="824307"/>
+              <a:off x="3992360" y="3576111"/>
+              <a:ext cx="0" cy="644287"/>
             </a:xfrm>
-            <a:prstGeom prst="rect"/>
+            <a:prstGeom prst="line">
+              <a:avLst/>
+            </a:prstGeom>
+            <a:ln w="19050">
+              <a:solidFill>
+                <a:srgbClr val="000000"/>
+              </a:solidFill>
+              <a:tailEnd type="triangle" w="med" len="med"/>
+            </a:ln>
           </p:spPr>
-        </p:pic>
+          <p:style>
+            <a:lnRef idx="2">
+              <a:schemeClr val="accent1"/>
+            </a:lnRef>
+            <a:fillRef idx="0">
+              <a:schemeClr val="accent1"/>
+            </a:fillRef>
+            <a:effectRef idx="1">
+              <a:schemeClr val="accent1"/>
+            </a:effectRef>
+            <a:fontRef idx="minor">
+              <a:schemeClr val="tx1"/>
+            </a:fontRef>
+          </p:style>
+        </p:cxnSp>
+        <p:cxnSp>
+          <p:nvCxnSpPr>
+            <p:cNvPr id="82" name="Connector 9"/>
+            <p:cNvCxnSpPr/>
+            <p:nvPr/>
+          </p:nvCxnSpPr>
+          <p:spPr>
+            <a:xfrm rot="0" flipH="false" flipV="false">
+              <a:off x="2015066" y="1789128"/>
+              <a:ext cx="0" cy="2430902"/>
+            </a:xfrm>
+            <a:prstGeom prst="line">
+              <a:avLst/>
+            </a:prstGeom>
+            <a:ln w="19050">
+              <a:solidFill>
+                <a:srgbClr val="000000"/>
+              </a:solidFill>
+              <a:tailEnd type="triangle" w="med" len="med"/>
+            </a:ln>
+          </p:spPr>
+          <p:style>
+            <a:lnRef idx="2">
+              <a:schemeClr val="accent1"/>
+            </a:lnRef>
+            <a:fillRef idx="0">
+              <a:schemeClr val="accent1"/>
+            </a:fillRef>
+            <a:effectRef idx="1">
+              <a:schemeClr val="accent1"/>
+            </a:effectRef>
+            <a:fontRef idx="minor">
+              <a:schemeClr val="tx1"/>
+            </a:fontRef>
+          </p:style>
+        </p:cxnSp>
+        <p:cxnSp>
+          <p:nvCxnSpPr>
+            <p:cNvPr id="83" name="Connector 9"/>
+            <p:cNvCxnSpPr/>
+            <p:nvPr/>
+          </p:nvCxnSpPr>
+          <p:spPr>
+            <a:xfrm rot="0" flipH="true" flipV="false">
+              <a:off x="4543315" y="3327102"/>
+              <a:ext cx="3618518" cy="48"/>
+            </a:xfrm>
+            <a:prstGeom prst="line">
+              <a:avLst/>
+            </a:prstGeom>
+            <a:ln w="19050">
+              <a:solidFill>
+                <a:srgbClr val="000000"/>
+              </a:solidFill>
+              <a:tailEnd type="triangle" w="med" len="med"/>
+            </a:ln>
+          </p:spPr>
+          <p:style>
+            <a:lnRef idx="2">
+              <a:schemeClr val="accent1"/>
+            </a:lnRef>
+            <a:fillRef idx="0">
+              <a:schemeClr val="accent1"/>
+            </a:fillRef>
+            <a:effectRef idx="1">
+              <a:schemeClr val="accent1"/>
+            </a:effectRef>
+            <a:fontRef idx="minor">
+              <a:schemeClr val="tx1"/>
+            </a:fontRef>
+          </p:style>
+        </p:cxnSp>
+        <p:sp>
+          <p:nvSpPr>
+            <p:cNvPr id="84" name="Rounded Rectangle 34"/>
+            <p:cNvSpPr/>
+            <p:nvPr/>
+          </p:nvSpPr>
+          <p:spPr>
+            <a:xfrm rot="0" flipH="false" flipV="false">
+              <a:off x="3632360" y="4314554"/>
+              <a:ext cx="647742" cy="381190"/>
+            </a:xfrm>
+            <a:prstGeom prst="roundRect">
+              <a:avLst/>
+            </a:prstGeom>
+            <a:solidFill>
+              <a:srgbClr val="E8E0F0"/>
+            </a:solidFill>
+            <a:ln w="19050">
+              <a:solidFill>
+                <a:srgbClr val="7B68EE"/>
+              </a:solidFill>
+            </a:ln>
+          </p:spPr>
+          <p:style>
+            <a:lnRef idx="1">
+              <a:schemeClr val="accent1"/>
+            </a:lnRef>
+            <a:fillRef idx="3">
+              <a:schemeClr val="accent1"/>
+            </a:fillRef>
+            <a:effectRef idx="2">
+              <a:schemeClr val="accent1"/>
+            </a:effectRef>
+            <a:fontRef idx="minor">
+              <a:schemeClr val="lt1"/>
+            </a:fontRef>
+          </p:style>
+          <p:txBody>
+            <a:bodyPr wrap="square" rtlCol="false" anchor="ctr"/>
+            <a:lstStyle/>
+            <a:p>
+              <a:pPr algn="ctr">
+                <a:spcBef>
+                  <a:spcPts val="0"/>
+                </a:spcBef>
+                <a:spcAft>
+                  <a:spcPts val="0"/>
+                </a:spcAft>
+              </a:pPr>
+              <a:r>
+                <a:rPr sz="1000" b="true">
+                  <a:solidFill>
+                    <a:srgbClr val="000000"/>
+                  </a:solidFill>
+                  <a:latin typeface="Arial"/>
+                </a:rPr>
+                <a:t>Concat</a:t>
+              </a:r>
+              <a:endParaRPr/>
+            </a:p>
+          </p:txBody>
+        </p:sp>
+        <p:cxnSp>
+          <p:nvCxnSpPr>
+            <p:cNvPr id="85" name="Connector 9"/>
+            <p:cNvCxnSpPr/>
+            <p:nvPr/>
+          </p:nvCxnSpPr>
+          <p:spPr>
+            <a:xfrm rot="0" flipH="false" flipV="false">
+              <a:off x="4398484" y="4505149"/>
+              <a:ext cx="923038" cy="0"/>
+            </a:xfrm>
+            <a:prstGeom prst="line">
+              <a:avLst/>
+            </a:prstGeom>
+            <a:ln w="19050">
+              <a:solidFill>
+                <a:srgbClr val="000000"/>
+              </a:solidFill>
+              <a:tailEnd type="triangle" w="med" len="med"/>
+            </a:ln>
+          </p:spPr>
+          <p:style>
+            <a:lnRef idx="2">
+              <a:schemeClr val="accent1"/>
+            </a:lnRef>
+            <a:fillRef idx="0">
+              <a:schemeClr val="accent1"/>
+            </a:fillRef>
+            <a:effectRef idx="1">
+              <a:schemeClr val="accent1"/>
+            </a:effectRef>
+            <a:fontRef idx="minor">
+              <a:schemeClr val="tx1"/>
+            </a:fontRef>
+          </p:style>
+        </p:cxnSp>
+        <p:sp>
+          <p:nvSpPr>
+            <p:cNvPr id="86" name="Rounded Rectangle 37"/>
+            <p:cNvSpPr/>
+            <p:nvPr/>
+          </p:nvSpPr>
+          <p:spPr>
+            <a:xfrm rot="0" flipH="false" flipV="false">
+              <a:off x="5439904" y="4356068"/>
+              <a:ext cx="642611" cy="298162"/>
+            </a:xfrm>
+            <a:prstGeom prst="roundRect">
+              <a:avLst/>
+            </a:prstGeom>
+            <a:solidFill>
+              <a:srgbClr val="E8E0F0"/>
+            </a:solidFill>
+            <a:ln w="19050">
+              <a:solidFill>
+                <a:srgbClr val="7B68EE"/>
+              </a:solidFill>
+            </a:ln>
+          </p:spPr>
+          <p:style>
+            <a:lnRef idx="1">
+              <a:schemeClr val="accent1"/>
+            </a:lnRef>
+            <a:fillRef idx="3">
+              <a:schemeClr val="accent1"/>
+            </a:fillRef>
+            <a:effectRef idx="2">
+              <a:schemeClr val="accent1"/>
+            </a:effectRef>
+            <a:fontRef idx="minor">
+              <a:schemeClr val="lt1"/>
+            </a:fontRef>
+          </p:style>
+          <p:txBody>
+            <a:bodyPr wrap="square" rtlCol="false" anchor="ctr"/>
+            <a:lstStyle/>
+            <a:p>
+              <a:pPr algn="ctr">
+                <a:spcBef>
+                  <a:spcPts val="0"/>
+                </a:spcBef>
+                <a:spcAft>
+                  <a:spcPts val="0"/>
+                </a:spcAft>
+              </a:pPr>
+              <a:r>
+                <a:rPr lang="en-US" sz="900" b="true">
+                  <a:solidFill>
+                    <a:srgbClr val="000000">
+                      <a:alpha val="100000"/>
+                    </a:srgbClr>
+                  </a:solidFill>
+                  <a:latin typeface="Arial"/>
+                  <a:ea typeface="宋体"/>
+                  <a:cs typeface="+mn-cs"/>
+                </a:rPr>
+                <a:t>3</a:t>
+              </a:r>
+              <a:r>
+                <a:rPr sz="900" b="true">
+                  <a:solidFill>
+                    <a:srgbClr val="000000">
+                      <a:alpha val="100000"/>
+                    </a:srgbClr>
+                  </a:solidFill>
+                  <a:latin typeface="Arial"/>
+                  <a:ea typeface="宋体"/>
+                  <a:cs typeface="+mn-cs"/>
+                </a:rPr>
+                <a:t>×</a:t>
+              </a:r>
+              <a:r>
+                <a:rPr lang="en-US" sz="900" b="true">
+                  <a:solidFill>
+                    <a:srgbClr val="000000">
+                      <a:alpha val="100000"/>
+                    </a:srgbClr>
+                  </a:solidFill>
+                  <a:latin typeface="Arial"/>
+                  <a:ea typeface="宋体"/>
+                  <a:cs typeface="+mn-cs"/>
+                </a:rPr>
+                <a:t>3</a:t>
+              </a:r>
+              <a:r>
+                <a:rPr sz="900" b="true">
+                  <a:solidFill>
+                    <a:srgbClr val="000000">
+                      <a:alpha val="100000"/>
+                    </a:srgbClr>
+                  </a:solidFill>
+                  <a:latin typeface="Arial"/>
+                  <a:ea typeface="宋体"/>
+                  <a:cs typeface="+mn-cs"/>
+                </a:rPr>
+                <a:t> Conv</a:t>
+              </a:r>
+              <a:endParaRPr/>
+            </a:p>
+          </p:txBody>
+        </p:sp>
+        <p:cxnSp>
+          <p:nvCxnSpPr>
+            <p:cNvPr id="87" name="Connector 9"/>
+            <p:cNvCxnSpPr/>
+            <p:nvPr/>
+          </p:nvCxnSpPr>
+          <p:spPr>
+            <a:xfrm rot="0" flipH="false" flipV="false">
+              <a:off x="6208868" y="4511149"/>
+              <a:ext cx="923038" cy="0"/>
+            </a:xfrm>
+            <a:prstGeom prst="line">
+              <a:avLst/>
+            </a:prstGeom>
+            <a:ln w="19050">
+              <a:solidFill>
+                <a:srgbClr val="000000"/>
+              </a:solidFill>
+              <a:tailEnd type="triangle" w="med" len="med"/>
+            </a:ln>
+          </p:spPr>
+          <p:style>
+            <a:lnRef idx="2">
+              <a:schemeClr val="accent1"/>
+            </a:lnRef>
+            <a:fillRef idx="0">
+              <a:schemeClr val="accent1"/>
+            </a:fillRef>
+            <a:effectRef idx="1">
+              <a:schemeClr val="accent1"/>
+            </a:effectRef>
+            <a:fontRef idx="minor">
+              <a:schemeClr val="tx1"/>
+            </a:fontRef>
+          </p:style>
+        </p:cxnSp>
+        <p:sp>
+          <p:nvSpPr>
+            <p:cNvPr id="88" name="Rounded Rectangle 32"/>
+            <p:cNvSpPr/>
+            <p:nvPr/>
+          </p:nvSpPr>
+          <p:spPr>
+            <a:xfrm rot="0" flipH="false" flipV="false">
+              <a:off x="7329654" y="4308550"/>
+              <a:ext cx="812248" cy="381198"/>
+            </a:xfrm>
+            <a:prstGeom prst="roundRect">
+              <a:avLst>
+                <a:gd name="adj" fmla="val 16667"/>
+              </a:avLst>
+            </a:prstGeom>
+            <a:solidFill>
+              <a:srgbClr val="E8E0F0"/>
+            </a:solidFill>
+            <a:ln w="19050">
+              <a:solidFill>
+                <a:srgbClr val="7B68EE"/>
+              </a:solidFill>
+            </a:ln>
+          </p:spPr>
+          <p:style>
+            <a:lnRef idx="1">
+              <a:schemeClr val="accent1"/>
+            </a:lnRef>
+            <a:fillRef idx="3">
+              <a:schemeClr val="accent1"/>
+            </a:fillRef>
+            <a:effectRef idx="2">
+              <a:schemeClr val="accent1"/>
+            </a:effectRef>
+            <a:fontRef idx="minor">
+              <a:schemeClr val="lt1"/>
+            </a:fontRef>
+          </p:style>
+          <p:txBody>
+            <a:bodyPr wrap="square" rtlCol="false" anchor="ctr"/>
+            <a:lstStyle/>
+            <a:p>
+              <a:pPr algn="ctr">
+                <a:spcBef>
+                  <a:spcPts val="0"/>
+                </a:spcBef>
+                <a:spcAft>
+                  <a:spcPts val="0"/>
+                </a:spcAft>
+              </a:pPr>
+              <a:r>
+                <a:rPr sz="900" b="true">
+                  <a:solidFill>
+                    <a:srgbClr val="000000"/>
+                  </a:solidFill>
+                  <a:latin typeface="Arial"/>
+                </a:rPr>
+                <a:t>Upsample
+×4</a:t>
+              </a:r>
+              <a:endParaRPr/>
+            </a:p>
+          </p:txBody>
+        </p:sp>
+        <p:cxnSp>
+          <p:nvCxnSpPr>
+            <p:cNvPr id="89" name="Connector 9"/>
+            <p:cNvCxnSpPr/>
+            <p:nvPr/>
+          </p:nvCxnSpPr>
+          <p:spPr>
+            <a:xfrm rot="0" flipH="false" flipV="false">
+              <a:off x="8267126" y="4499149"/>
+              <a:ext cx="923038" cy="0"/>
+            </a:xfrm>
+            <a:prstGeom prst="line">
+              <a:avLst/>
+            </a:prstGeom>
+            <a:ln w="19050">
+              <a:solidFill>
+                <a:srgbClr val="000000"/>
+              </a:solidFill>
+              <a:tailEnd type="triangle" w="med" len="med"/>
+            </a:ln>
+          </p:spPr>
+          <p:style>
+            <a:lnRef idx="2">
+              <a:schemeClr val="accent1"/>
+            </a:lnRef>
+            <a:fillRef idx="0">
+              <a:schemeClr val="accent1"/>
+            </a:fillRef>
+            <a:effectRef idx="1">
+              <a:schemeClr val="accent1"/>
+            </a:effectRef>
+            <a:fontRef idx="minor">
+              <a:schemeClr val="tx1"/>
+            </a:fontRef>
+          </p:style>
+        </p:cxnSp>
+        <p:sp>
+          <p:nvSpPr>
+            <p:cNvPr id="90" name=""/>
+            <p:cNvSpPr/>
+            <p:nvPr/>
+          </p:nvSpPr>
+          <p:spPr>
+            <a:xfrm rot="0" flipH="false" flipV="false">
+              <a:off x="1175389" y="2866939"/>
+              <a:ext cx="7829112" cy="2362200"/>
+            </a:xfrm>
+            <a:prstGeom prst="roundRect">
+              <a:avLst/>
+            </a:prstGeom>
+            <a:noFill/>
+            <a:ln w="12700">
+              <a:solidFill>
+                <a:srgbClr val="5C5C5C">
+                  <a:alpha val="100000"/>
+                </a:srgbClr>
+              </a:solidFill>
+              <a:prstDash val="sysDash"/>
+              <a:miter lim="800000"/>
+            </a:ln>
+          </p:spPr>
+          <p:txBody>
+            <a:bodyPr anchor="ctr"/>
+            <a:p>
+              <a:pPr algn="ctr"/>
+              <a:endParaRPr/>
+            </a:p>
+          </p:txBody>
+        </p:sp>
       </p:grpSp>
+      <p:sp>
+        <p:nvSpPr>
+          <p:cNvPr id="91" name="TextBox 51"/>
+          <p:cNvSpPr txBox="true"/>
+          <p:nvPr/>
+        </p:nvSpPr>
+        <p:spPr>
+          <a:xfrm rot="0" flipH="false" flipV="false">
+            <a:off x="1641759" y="3417238"/>
+            <a:ext cx="1079500" cy="304800"/>
+          </a:xfrm>
+          <a:prstGeom prst="rect">
+            <a:avLst/>
+          </a:prstGeom>
+          <a:noFill/>
+        </p:spPr>
+        <p:txBody>
+          <a:bodyPr wrap="square">
+            <a:spAutoFit/>
+          </a:bodyPr>
+          <a:lstStyle/>
+          <a:p>
+            <a:pPr algn="ctr">
+              <a:defRPr sz="1400" b="true">
+                <a:solidFill>
+                  <a:srgbClr val="2E75B6">
+                    <a:alpha val="100000"/>
+                  </a:srgbClr>
+                </a:solidFill>
+                <a:latin typeface="Arial"/>
+                <a:ea typeface="宋体"/>
+                <a:cs typeface="+mn-cs"/>
+              </a:defRPr>
+            </a:pPr>
+            <a:r>
+              <a:rPr lang="en-US"/>
+              <a:t>De</a:t>
+            </a:r>
+            <a:r>
+              <a:rPr/>
+              <a:t>coder</a:t>
+            </a:r>
+            <a:endParaRPr/>
+          </a:p>
+        </p:txBody>
+      </p:sp>
+      <p:pic>
+        <p:nvPicPr>
+          <p:cNvPr id="92" name=""/>
+          <p:cNvPicPr>
+            <a:picLocks noChangeAspect="true"/>
+          </p:cNvPicPr>
+          <p:nvPr/>
+        </p:nvPicPr>
+        <p:blipFill>
+          <a:blip r:embed=""/>
+          <a:stretch>
+            <a:fillRect/>
+          </a:stretch>
+        </p:blipFill>
+        <p:spPr>
+          <a:xfrm rot="0" flipH="false" flipV="false">
+            <a:off x="506818" y="1422945"/>
+            <a:ext cx="890715" cy="890715"/>
+          </a:xfrm>
+          <a:prstGeom prst="rect"/>
+        </p:spPr>
+      </p:pic>
+      <p:cxnSp>
+        <p:nvCxnSpPr>
+          <p:cNvPr id="93" name="Connector 9"/>
+          <p:cNvCxnSpPr/>
+          <p:nvPr/>
+        </p:nvCxnSpPr>
+        <p:spPr>
+          <a:xfrm rot="0" flipH="false" flipV="false">
+            <a:off x="1451456" y="1900366"/>
+            <a:ext cx="444307" cy="0"/>
+          </a:xfrm>
+          <a:prstGeom prst="line">
+            <a:avLst/>
+          </a:prstGeom>
+          <a:ln w="19050">
+            <a:solidFill>
+              <a:srgbClr val="000000"/>
+            </a:solidFill>
+            <a:tailEnd type="triangle" w="med" len="med"/>
+          </a:ln>
+        </p:spPr>
+        <p:style>
+          <a:lnRef idx="2">
+            <a:schemeClr val="accent1"/>
+          </a:lnRef>
+          <a:fillRef idx="0">
+            <a:schemeClr val="accent1"/>
+          </a:fillRef>
+          <a:effectRef idx="1">
+            <a:schemeClr val="accent1"/>
+          </a:effectRef>
+          <a:fontRef idx="minor">
+            <a:schemeClr val="tx1"/>
+          </a:fontRef>
+        </p:style>
+      </p:cxnSp>
+      <p:pic>
+        <p:nvPicPr>
+          <p:cNvPr id="94" name=""/>
+          <p:cNvPicPr>
+            <a:picLocks noChangeAspect="true"/>
+          </p:cNvPicPr>
+          <p:nvPr/>
+        </p:nvPicPr>
+        <p:blipFill>
+          <a:blip r:embed=""/>
+          <a:stretch>
+            <a:fillRect/>
+          </a:stretch>
+        </p:blipFill>
+        <p:spPr>
+          <a:xfrm rot="0" flipH="false" flipV="false">
+            <a:off x="9754582" y="4642412"/>
+            <a:ext cx="824307" cy="824307"/>
+          </a:xfrm>
+          <a:prstGeom prst="rect"/>
+        </p:spPr>
+      </p:pic>
     </p:spTree>
   </p:cSld>
 </p:sld>
@@ -7602,7 +7587,7 @@
   <p:cSld>
     <p:spTree>
       <p:nvGrpSpPr>
-        <p:cNvPr id="96" name=""/>
+        <p:cNvPr id="95" name=""/>
         <p:cNvGrpSpPr/>
         <p:nvPr/>
       </p:nvGrpSpPr>
